--- a/videos/deep-learning/002_transformers_part2/recreated_pptx/slide_020_recreated.pptx
+++ b/videos/deep-learning/002_transformers_part2/recreated_pptx/slide_020_recreated.pptx
@@ -1299,6 +1299,30 @@
         </p:nvSpPr>
         <p:spPr>
           <a:xfrm>
+            <a:off x="1947112" y="1275906"/>
+            <a:ext cx="9473165" cy="558209"/>
+          </a:xfrm>
+          <a:prstGeom prst="roundRect">
+            <a:avLst>
+              <a:gd name="adj" fmla="val 9829"/>
+            </a:avLst>
+          </a:prstGeom>
+          <a:ln w="12700">
+            <a:solidFill>
+              <a:srgbClr val="595959"/>
+            </a:solidFill>
+            <a:prstDash val="sysDash"/>
+          </a:ln>
+        </p:spPr>
+      </p:sp>
+      <p:sp>
+        <p:nvSpPr>
+          <p:cNvPr id="11" name="Shape 9"/>
+          <p:cNvSpPr/>
+          <p:nvPr/>
+        </p:nvSpPr>
+        <p:spPr>
+          <a:xfrm>
             <a:off x="2131708" y="1408813"/>
             <a:ext cx="833120" cy="285750"/>
           </a:xfrm>
@@ -1318,7 +1342,7 @@
       </p:sp>
       <p:sp>
         <p:nvSpPr>
-          <p:cNvPr id="11" name="Text 9"/>
+          <p:cNvPr id="12" name="Text 10"/>
           <p:cNvSpPr/>
           <p:nvPr/>
         </p:nvSpPr>
@@ -1360,7 +1384,7 @@
       </p:sp>
       <p:sp>
         <p:nvSpPr>
-          <p:cNvPr id="12" name="Shape 10"/>
+          <p:cNvPr id="13" name="Shape 11"/>
           <p:cNvSpPr/>
           <p:nvPr/>
         </p:nvSpPr>
@@ -1385,7 +1409,7 @@
       </p:sp>
       <p:sp>
         <p:nvSpPr>
-          <p:cNvPr id="13" name="Text 11"/>
+          <p:cNvPr id="14" name="Text 12"/>
           <p:cNvSpPr/>
           <p:nvPr/>
         </p:nvSpPr>
@@ -1427,7 +1451,7 @@
       </p:sp>
       <p:sp>
         <p:nvSpPr>
-          <p:cNvPr id="14" name="Shape 12"/>
+          <p:cNvPr id="15" name="Shape 13"/>
           <p:cNvSpPr/>
           <p:nvPr/>
         </p:nvSpPr>
@@ -1452,7 +1476,7 @@
       </p:sp>
       <p:sp>
         <p:nvSpPr>
-          <p:cNvPr id="15" name="Text 13"/>
+          <p:cNvPr id="16" name="Text 14"/>
           <p:cNvSpPr/>
           <p:nvPr/>
         </p:nvSpPr>
@@ -1494,7 +1518,7 @@
       </p:sp>
       <p:sp>
         <p:nvSpPr>
-          <p:cNvPr id="16" name="Shape 14"/>
+          <p:cNvPr id="17" name="Shape 15"/>
           <p:cNvSpPr/>
           <p:nvPr/>
         </p:nvSpPr>
@@ -1519,7 +1543,7 @@
       </p:sp>
       <p:sp>
         <p:nvSpPr>
-          <p:cNvPr id="17" name="Text 15"/>
+          <p:cNvPr id="18" name="Text 16"/>
           <p:cNvSpPr/>
           <p:nvPr/>
         </p:nvSpPr>
@@ -1561,7 +1585,7 @@
       </p:sp>
       <p:sp>
         <p:nvSpPr>
-          <p:cNvPr id="18" name="Shape 16"/>
+          <p:cNvPr id="19" name="Shape 17"/>
           <p:cNvSpPr/>
           <p:nvPr/>
         </p:nvSpPr>
@@ -1586,7 +1610,7 @@
       </p:sp>
       <p:sp>
         <p:nvSpPr>
-          <p:cNvPr id="19" name="Text 17"/>
+          <p:cNvPr id="20" name="Text 18"/>
           <p:cNvSpPr/>
           <p:nvPr/>
         </p:nvSpPr>
@@ -1628,7 +1652,7 @@
       </p:sp>
       <p:sp>
         <p:nvSpPr>
-          <p:cNvPr id="20" name="Shape 18"/>
+          <p:cNvPr id="21" name="Shape 19"/>
           <p:cNvSpPr/>
           <p:nvPr/>
         </p:nvSpPr>
@@ -1653,7 +1677,7 @@
       </p:sp>
       <p:sp>
         <p:nvSpPr>
-          <p:cNvPr id="21" name="Text 19"/>
+          <p:cNvPr id="22" name="Text 20"/>
           <p:cNvSpPr/>
           <p:nvPr/>
         </p:nvSpPr>
@@ -1695,7 +1719,7 @@
       </p:sp>
       <p:sp>
         <p:nvSpPr>
-          <p:cNvPr id="22" name="Shape 20"/>
+          <p:cNvPr id="23" name="Shape 21"/>
           <p:cNvSpPr/>
           <p:nvPr/>
         </p:nvSpPr>
@@ -1720,7 +1744,7 @@
       </p:sp>
       <p:sp>
         <p:nvSpPr>
-          <p:cNvPr id="23" name="Text 21"/>
+          <p:cNvPr id="24" name="Text 22"/>
           <p:cNvSpPr/>
           <p:nvPr/>
         </p:nvSpPr>
@@ -1779,7 +1803,7 @@
       </p:sp>
       <p:sp>
         <p:nvSpPr>
-          <p:cNvPr id="24" name="Shape 22"/>
+          <p:cNvPr id="25" name="Shape 23"/>
           <p:cNvSpPr/>
           <p:nvPr/>
         </p:nvSpPr>
@@ -1804,7 +1828,7 @@
       </p:sp>
       <p:sp>
         <p:nvSpPr>
-          <p:cNvPr id="25" name="Text 23"/>
+          <p:cNvPr id="26" name="Text 24"/>
           <p:cNvSpPr/>
           <p:nvPr/>
         </p:nvSpPr>
@@ -1863,14 +1887,14 @@
       </p:sp>
       <p:sp>
         <p:nvSpPr>
-          <p:cNvPr id="26" name="Shape 24"/>
-          <p:cNvSpPr/>
-          <p:nvPr/>
-        </p:nvSpPr>
-        <p:spPr>
-          <a:xfrm>
-            <a:off x="8070743" y="1468740"/>
-            <a:ext cx="119380" cy="119380"/>
+          <p:cNvPr id="27" name="Shape 25"/>
+          <p:cNvSpPr/>
+          <p:nvPr/>
+        </p:nvSpPr>
+        <p:spPr>
+          <a:xfrm>
+            <a:off x="8076458" y="1474455"/>
+            <a:ext cx="107950" cy="107950"/>
           </a:xfrm>
           <a:prstGeom prst="ellipse">
             <a:avLst/>
@@ -1888,14 +1912,14 @@
       </p:sp>
       <p:sp>
         <p:nvSpPr>
-          <p:cNvPr id="27" name="Shape 25"/>
-          <p:cNvSpPr/>
-          <p:nvPr/>
-        </p:nvSpPr>
-        <p:spPr>
-          <a:xfrm>
-            <a:off x="8308563" y="1468740"/>
-            <a:ext cx="119380" cy="119380"/>
+          <p:cNvPr id="28" name="Shape 26"/>
+          <p:cNvSpPr/>
+          <p:nvPr/>
+        </p:nvSpPr>
+        <p:spPr>
+          <a:xfrm>
+            <a:off x="8314278" y="1474455"/>
+            <a:ext cx="107950" cy="107950"/>
           </a:xfrm>
           <a:prstGeom prst="ellipse">
             <a:avLst/>
@@ -1913,14 +1937,14 @@
       </p:sp>
       <p:sp>
         <p:nvSpPr>
-          <p:cNvPr id="28" name="Shape 26"/>
-          <p:cNvSpPr/>
-          <p:nvPr/>
-        </p:nvSpPr>
-        <p:spPr>
-          <a:xfrm>
-            <a:off x="8552989" y="1468740"/>
-            <a:ext cx="119380" cy="119380"/>
+          <p:cNvPr id="29" name="Shape 27"/>
+          <p:cNvSpPr/>
+          <p:nvPr/>
+        </p:nvSpPr>
+        <p:spPr>
+          <a:xfrm>
+            <a:off x="8558704" y="1474455"/>
+            <a:ext cx="107950" cy="107950"/>
           </a:xfrm>
           <a:prstGeom prst="ellipse">
             <a:avLst/>
@@ -1938,14 +1962,14 @@
       </p:sp>
       <p:sp>
         <p:nvSpPr>
-          <p:cNvPr id="29" name="Shape 27"/>
-          <p:cNvSpPr/>
-          <p:nvPr/>
-        </p:nvSpPr>
-        <p:spPr>
-          <a:xfrm>
-            <a:off x="8790809" y="1468740"/>
-            <a:ext cx="119380" cy="119380"/>
+          <p:cNvPr id="30" name="Shape 28"/>
+          <p:cNvSpPr/>
+          <p:nvPr/>
+        </p:nvSpPr>
+        <p:spPr>
+          <a:xfrm>
+            <a:off x="8796524" y="1474455"/>
+            <a:ext cx="107950" cy="107950"/>
           </a:xfrm>
           <a:prstGeom prst="ellipse">
             <a:avLst/>
@@ -1963,14 +1987,14 @@
       </p:sp>
       <p:sp>
         <p:nvSpPr>
-          <p:cNvPr id="30" name="Shape 28"/>
-          <p:cNvSpPr/>
-          <p:nvPr/>
-        </p:nvSpPr>
-        <p:spPr>
-          <a:xfrm>
-            <a:off x="8988993" y="1468740"/>
-            <a:ext cx="119380" cy="119380"/>
+          <p:cNvPr id="31" name="Shape 29"/>
+          <p:cNvSpPr/>
+          <p:nvPr/>
+        </p:nvSpPr>
+        <p:spPr>
+          <a:xfrm>
+            <a:off x="8994708" y="1474455"/>
+            <a:ext cx="107950" cy="107950"/>
           </a:xfrm>
           <a:prstGeom prst="ellipse">
             <a:avLst/>
@@ -1988,7 +2012,7 @@
       </p:sp>
       <p:sp>
         <p:nvSpPr>
-          <p:cNvPr id="31" name="Shape 29"/>
+          <p:cNvPr id="32" name="Shape 30"/>
           <p:cNvSpPr/>
           <p:nvPr/>
         </p:nvSpPr>
@@ -1997,8 +2021,10 @@
             <a:off x="1920688" y="2053412"/>
             <a:ext cx="9499590" cy="505046"/>
           </a:xfrm>
-          <a:prstGeom prst="rect">
-            <a:avLst/>
+          <a:prstGeom prst="roundRect">
+            <a:avLst>
+              <a:gd name="adj" fmla="val 10863"/>
+            </a:avLst>
           </a:prstGeom>
           <a:solidFill>
             <a:srgbClr val="E7FEE9"/>
@@ -2007,29 +2033,7 @@
             <a:solidFill>
               <a:srgbClr val="00A550"/>
             </a:solidFill>
-            <a:prstDash val="dash"/>
-          </a:ln>
-        </p:spPr>
-      </p:sp>
-      <p:sp>
-        <p:nvSpPr>
-          <p:cNvPr id="32" name="Shape 30"/>
-          <p:cNvSpPr/>
-          <p:nvPr/>
-        </p:nvSpPr>
-        <p:spPr>
-          <a:xfrm>
-            <a:off x="1814990" y="2099929"/>
-            <a:ext cx="819158" cy="465174"/>
-          </a:xfrm>
-          <a:prstGeom prst="rect">
-            <a:avLst/>
-          </a:prstGeom>
-          <a:ln w="9525">
-            <a:solidFill>
-              <a:srgbClr val="C00000"/>
-            </a:solidFill>
-            <a:prstDash val="solid"/>
+            <a:prstDash val="sysDash"/>
           </a:ln>
         </p:spPr>
       </p:sp>
@@ -2041,14 +2045,14 @@
         </p:nvSpPr>
         <p:spPr>
           <a:xfrm>
-            <a:off x="1814990" y="2179673"/>
-            <a:ext cx="136526" cy="239232"/>
-          </a:xfrm>
-          <a:prstGeom prst="rect">
-            <a:avLst/>
-          </a:prstGeom>
-          <a:solidFill>
-            <a:srgbClr val="F5E6A3"/>
+            <a:off x="2211356" y="2179673"/>
+            <a:ext cx="132122" cy="239232"/>
+          </a:xfrm>
+          <a:prstGeom prst="rect">
+            <a:avLst/>
+          </a:prstGeom>
+          <a:solidFill>
+            <a:srgbClr val="EFE9BE"/>
           </a:solidFill>
           <a:ln w="6350">
             <a:solidFill>
@@ -2066,14 +2070,14 @@
         </p:nvSpPr>
         <p:spPr>
           <a:xfrm>
-            <a:off x="1951516" y="2179673"/>
-            <a:ext cx="136526" cy="239232"/>
-          </a:xfrm>
-          <a:prstGeom prst="rect">
-            <a:avLst/>
-          </a:prstGeom>
-          <a:solidFill>
-            <a:srgbClr val="F5E6A3"/>
+            <a:off x="2343479" y="2179673"/>
+            <a:ext cx="132122" cy="239232"/>
+          </a:xfrm>
+          <a:prstGeom prst="rect">
+            <a:avLst/>
+          </a:prstGeom>
+          <a:solidFill>
+            <a:srgbClr val="EAF8D8"/>
           </a:solidFill>
           <a:ln w="6350">
             <a:solidFill>
@@ -2091,14 +2095,14 @@
         </p:nvSpPr>
         <p:spPr>
           <a:xfrm>
-            <a:off x="2088042" y="2179673"/>
-            <a:ext cx="136526" cy="239232"/>
-          </a:xfrm>
-          <a:prstGeom prst="rect">
-            <a:avLst/>
-          </a:prstGeom>
-          <a:solidFill>
-            <a:srgbClr val="F5E6A3"/>
+            <a:off x="2475601" y="2179673"/>
+            <a:ext cx="132122" cy="239232"/>
+          </a:xfrm>
+          <a:prstGeom prst="rect">
+            <a:avLst/>
+          </a:prstGeom>
+          <a:solidFill>
+            <a:srgbClr val="F2A7C3"/>
           </a:solidFill>
           <a:ln w="6350">
             <a:solidFill>
@@ -2116,14 +2120,14 @@
         </p:nvSpPr>
         <p:spPr>
           <a:xfrm>
-            <a:off x="2224569" y="2179673"/>
-            <a:ext cx="136526" cy="239232"/>
-          </a:xfrm>
-          <a:prstGeom prst="rect">
-            <a:avLst/>
-          </a:prstGeom>
-          <a:solidFill>
-            <a:srgbClr val="F5E6A3"/>
+            <a:off x="2607723" y="2179673"/>
+            <a:ext cx="132122" cy="239232"/>
+          </a:xfrm>
+          <a:prstGeom prst="rect">
+            <a:avLst/>
+          </a:prstGeom>
+          <a:solidFill>
+            <a:srgbClr val="E9E7F4"/>
           </a:solidFill>
           <a:ln w="6350">
             <a:solidFill>
@@ -2141,14 +2145,14 @@
         </p:nvSpPr>
         <p:spPr>
           <a:xfrm>
-            <a:off x="2361095" y="2179673"/>
-            <a:ext cx="136526" cy="239232"/>
-          </a:xfrm>
-          <a:prstGeom prst="rect">
-            <a:avLst/>
-          </a:prstGeom>
-          <a:solidFill>
-            <a:srgbClr val="F5E6A3"/>
+            <a:off x="2739845" y="2179673"/>
+            <a:ext cx="132122" cy="239232"/>
+          </a:xfrm>
+          <a:prstGeom prst="rect">
+            <a:avLst/>
+          </a:prstGeom>
+          <a:solidFill>
+            <a:srgbClr val="F2DEEC"/>
           </a:solidFill>
           <a:ln w="6350">
             <a:solidFill>
@@ -2166,14 +2170,14 @@
         </p:nvSpPr>
         <p:spPr>
           <a:xfrm>
-            <a:off x="2497621" y="2179673"/>
-            <a:ext cx="136526" cy="239232"/>
-          </a:xfrm>
-          <a:prstGeom prst="rect">
-            <a:avLst/>
-          </a:prstGeom>
-          <a:solidFill>
-            <a:srgbClr val="F2A7C3"/>
+            <a:off x="2871968" y="2179673"/>
+            <a:ext cx="132122" cy="239232"/>
+          </a:xfrm>
+          <a:prstGeom prst="rect">
+            <a:avLst/>
+          </a:prstGeom>
+          <a:solidFill>
+            <a:srgbClr val="E6DDDB"/>
           </a:solidFill>
           <a:ln w="6350">
             <a:solidFill>
@@ -2191,8 +2195,8 @@
         </p:nvSpPr>
         <p:spPr>
           <a:xfrm>
-            <a:off x="2497621" y="2179673"/>
-            <a:ext cx="136526" cy="239232"/>
+            <a:off x="2325762" y="2166973"/>
+            <a:ext cx="431800" cy="264632"/>
           </a:xfrm>
           <a:prstGeom prst="rect">
             <a:avLst/>
@@ -2201,14 +2205,14 @@
           <a:ln/>
         </p:spPr>
         <p:txBody>
-          <a:bodyPr wrap="square" lIns="0" tIns="0" rIns="0" bIns="0" rtlCol="0" anchor="ctr"/>
+          <a:bodyPr wrap="none" lIns="0" tIns="0" rIns="0" bIns="0" rtlCol="0" anchor="ctr"/>
           <a:lstStyle/>
           <a:p>
             <a:pPr algn="ctr" indent="0" marL="0">
               <a:buNone/>
             </a:pPr>
             <a:r>
-              <a:rPr lang="en-US" sz="1100" i="1" dirty="0">
+              <a:rPr lang="en-US" sz="900" i="1" dirty="0">
                 <a:solidFill>
                   <a:srgbClr val="C00000"/>
                 </a:solidFill>
@@ -2222,7 +2226,7 @@
               <a:buNone/>
             </a:pPr>
             <a:r>
-              <a:rPr lang="en-US" sz="750" i="1" baseline="-40000" dirty="0">
+              <a:rPr lang="en-US" sz="700" i="1" baseline="-40000" dirty="0">
                 <a:solidFill>
                   <a:srgbClr val="C00000"/>
                 </a:solidFill>
@@ -2232,7 +2236,7 @@
               </a:rPr>
               <a:t>0</a:t>
             </a:r>
-            <a:endParaRPr lang="en-US" sz="1100" dirty="0"/>
+            <a:endParaRPr lang="en-US" sz="900" dirty="0"/>
           </a:p>
         </p:txBody>
       </p:sp>
@@ -2244,15 +2248,18 @@
         </p:nvSpPr>
         <p:spPr>
           <a:xfrm>
-            <a:off x="2779482" y="2099929"/>
-            <a:ext cx="819158" cy="465174"/>
-          </a:xfrm>
-          <a:prstGeom prst="rect">
-            <a:avLst/>
-          </a:prstGeom>
-          <a:ln w="9525">
-            <a:solidFill>
-              <a:srgbClr val="C00000"/>
+            <a:off x="3189061" y="2179673"/>
+            <a:ext cx="132122" cy="239232"/>
+          </a:xfrm>
+          <a:prstGeom prst="rect">
+            <a:avLst/>
+          </a:prstGeom>
+          <a:solidFill>
+            <a:srgbClr val="EFE9BE"/>
+          </a:solidFill>
+          <a:ln w="6350">
+            <a:solidFill>
+              <a:srgbClr val="999999"/>
             </a:solidFill>
             <a:prstDash val="solid"/>
           </a:ln>
@@ -2266,14 +2273,14 @@
         </p:nvSpPr>
         <p:spPr>
           <a:xfrm>
-            <a:off x="2779482" y="2179673"/>
-            <a:ext cx="136526" cy="239232"/>
-          </a:xfrm>
-          <a:prstGeom prst="rect">
-            <a:avLst/>
-          </a:prstGeom>
-          <a:solidFill>
-            <a:srgbClr val="F5E6A3"/>
+            <a:off x="3321183" y="2179673"/>
+            <a:ext cx="132122" cy="239232"/>
+          </a:xfrm>
+          <a:prstGeom prst="rect">
+            <a:avLst/>
+          </a:prstGeom>
+          <a:solidFill>
+            <a:srgbClr val="EAF8D8"/>
           </a:solidFill>
           <a:ln w="6350">
             <a:solidFill>
@@ -2291,14 +2298,14 @@
         </p:nvSpPr>
         <p:spPr>
           <a:xfrm>
-            <a:off x="2916008" y="2179673"/>
-            <a:ext cx="136526" cy="239232"/>
-          </a:xfrm>
-          <a:prstGeom prst="rect">
-            <a:avLst/>
-          </a:prstGeom>
-          <a:solidFill>
-            <a:srgbClr val="F5E6A3"/>
+            <a:off x="3453306" y="2179673"/>
+            <a:ext cx="132122" cy="239232"/>
+          </a:xfrm>
+          <a:prstGeom prst="rect">
+            <a:avLst/>
+          </a:prstGeom>
+          <a:solidFill>
+            <a:srgbClr val="F2A7C3"/>
           </a:solidFill>
           <a:ln w="6350">
             <a:solidFill>
@@ -2316,14 +2323,14 @@
         </p:nvSpPr>
         <p:spPr>
           <a:xfrm>
-            <a:off x="3052535" y="2179673"/>
-            <a:ext cx="136526" cy="239232"/>
-          </a:xfrm>
-          <a:prstGeom prst="rect">
-            <a:avLst/>
-          </a:prstGeom>
-          <a:solidFill>
-            <a:srgbClr val="F5E6A3"/>
+            <a:off x="3585428" y="2179673"/>
+            <a:ext cx="132122" cy="239232"/>
+          </a:xfrm>
+          <a:prstGeom prst="rect">
+            <a:avLst/>
+          </a:prstGeom>
+          <a:solidFill>
+            <a:srgbClr val="E9E7F4"/>
           </a:solidFill>
           <a:ln w="6350">
             <a:solidFill>
@@ -2341,14 +2348,14 @@
         </p:nvSpPr>
         <p:spPr>
           <a:xfrm>
-            <a:off x="3189061" y="2179673"/>
-            <a:ext cx="136526" cy="239232"/>
-          </a:xfrm>
-          <a:prstGeom prst="rect">
-            <a:avLst/>
-          </a:prstGeom>
-          <a:solidFill>
-            <a:srgbClr val="F5E6A3"/>
+            <a:off x="3717550" y="2179673"/>
+            <a:ext cx="132122" cy="239232"/>
+          </a:xfrm>
+          <a:prstGeom prst="rect">
+            <a:avLst/>
+          </a:prstGeom>
+          <a:solidFill>
+            <a:srgbClr val="F2DEEC"/>
           </a:solidFill>
           <a:ln w="6350">
             <a:solidFill>
@@ -2366,14 +2373,14 @@
         </p:nvSpPr>
         <p:spPr>
           <a:xfrm>
-            <a:off x="3325587" y="2179673"/>
-            <a:ext cx="136526" cy="239232"/>
-          </a:xfrm>
-          <a:prstGeom prst="rect">
-            <a:avLst/>
-          </a:prstGeom>
-          <a:solidFill>
-            <a:srgbClr val="F5E6A3"/>
+            <a:off x="3849672" y="2179673"/>
+            <a:ext cx="132122" cy="239232"/>
+          </a:xfrm>
+          <a:prstGeom prst="rect">
+            <a:avLst/>
+          </a:prstGeom>
+          <a:solidFill>
+            <a:srgbClr val="E6DDDB"/>
           </a:solidFill>
           <a:ln w="6350">
             <a:solidFill>
@@ -2385,39 +2392,14 @@
       </p:sp>
       <p:sp>
         <p:nvSpPr>
-          <p:cNvPr id="46" name="Shape 44"/>
-          <p:cNvSpPr/>
-          <p:nvPr/>
-        </p:nvSpPr>
-        <p:spPr>
-          <a:xfrm>
-            <a:off x="3462114" y="2179673"/>
-            <a:ext cx="136526" cy="239232"/>
-          </a:xfrm>
-          <a:prstGeom prst="rect">
-            <a:avLst/>
-          </a:prstGeom>
-          <a:solidFill>
-            <a:srgbClr val="F2A7C3"/>
-          </a:solidFill>
-          <a:ln w="6350">
-            <a:solidFill>
-              <a:srgbClr val="999999"/>
-            </a:solidFill>
-            <a:prstDash val="solid"/>
-          </a:ln>
-        </p:spPr>
-      </p:sp>
-      <p:sp>
-        <p:nvSpPr>
-          <p:cNvPr id="47" name="Text 45"/>
-          <p:cNvSpPr/>
-          <p:nvPr/>
-        </p:nvSpPr>
-        <p:spPr>
-          <a:xfrm>
-            <a:off x="3462114" y="2179673"/>
-            <a:ext cx="136526" cy="239232"/>
+          <p:cNvPr id="46" name="Text 44"/>
+          <p:cNvSpPr/>
+          <p:nvPr/>
+        </p:nvSpPr>
+        <p:spPr>
+          <a:xfrm>
+            <a:off x="3303467" y="2166973"/>
+            <a:ext cx="431800" cy="264632"/>
           </a:xfrm>
           <a:prstGeom prst="rect">
             <a:avLst/>
@@ -2426,14 +2408,14 @@
           <a:ln/>
         </p:spPr>
         <p:txBody>
-          <a:bodyPr wrap="square" lIns="0" tIns="0" rIns="0" bIns="0" rtlCol="0" anchor="ctr"/>
+          <a:bodyPr wrap="none" lIns="0" tIns="0" rIns="0" bIns="0" rtlCol="0" anchor="ctr"/>
           <a:lstStyle/>
           <a:p>
             <a:pPr algn="ctr" indent="0" marL="0">
               <a:buNone/>
             </a:pPr>
             <a:r>
-              <a:rPr lang="en-US" sz="1100" i="1" dirty="0">
+              <a:rPr lang="en-US" sz="900" i="1" dirty="0">
                 <a:solidFill>
                   <a:srgbClr val="C00000"/>
                 </a:solidFill>
@@ -2447,7 +2429,7 @@
               <a:buNone/>
             </a:pPr>
             <a:r>
-              <a:rPr lang="en-US" sz="750" i="1" baseline="-40000" dirty="0">
+              <a:rPr lang="en-US" sz="700" i="1" baseline="-40000" dirty="0">
                 <a:solidFill>
                   <a:srgbClr val="C00000"/>
                 </a:solidFill>
@@ -2457,27 +2439,55 @@
               </a:rPr>
               <a:t>1</a:t>
             </a:r>
-            <a:endParaRPr lang="en-US" sz="1100" dirty="0"/>
+            <a:endParaRPr lang="en-US" sz="900" dirty="0"/>
           </a:p>
         </p:txBody>
       </p:sp>
       <p:sp>
         <p:nvSpPr>
+          <p:cNvPr id="47" name="Shape 45"/>
+          <p:cNvSpPr/>
+          <p:nvPr/>
+        </p:nvSpPr>
+        <p:spPr>
+          <a:xfrm>
+            <a:off x="4140341" y="2179673"/>
+            <a:ext cx="132122" cy="239232"/>
+          </a:xfrm>
+          <a:prstGeom prst="rect">
+            <a:avLst/>
+          </a:prstGeom>
+          <a:solidFill>
+            <a:srgbClr val="EFE9BE"/>
+          </a:solidFill>
+          <a:ln w="6350">
+            <a:solidFill>
+              <a:srgbClr val="999999"/>
+            </a:solidFill>
+            <a:prstDash val="solid"/>
+          </a:ln>
+        </p:spPr>
+      </p:sp>
+      <p:sp>
+        <p:nvSpPr>
           <p:cNvPr id="48" name="Shape 46"/>
           <p:cNvSpPr/>
           <p:nvPr/>
         </p:nvSpPr>
         <p:spPr>
           <a:xfrm>
-            <a:off x="3743975" y="2099929"/>
-            <a:ext cx="819158" cy="465174"/>
-          </a:xfrm>
-          <a:prstGeom prst="rect">
-            <a:avLst/>
-          </a:prstGeom>
-          <a:ln w="9525">
-            <a:solidFill>
-              <a:srgbClr val="C00000"/>
+            <a:off x="4272464" y="2179673"/>
+            <a:ext cx="132122" cy="239232"/>
+          </a:xfrm>
+          <a:prstGeom prst="rect">
+            <a:avLst/>
+          </a:prstGeom>
+          <a:solidFill>
+            <a:srgbClr val="EAF8D8"/>
+          </a:solidFill>
+          <a:ln w="6350">
+            <a:solidFill>
+              <a:srgbClr val="999999"/>
             </a:solidFill>
             <a:prstDash val="solid"/>
           </a:ln>
@@ -2491,14 +2501,14 @@
         </p:nvSpPr>
         <p:spPr>
           <a:xfrm>
-            <a:off x="3743975" y="2179673"/>
-            <a:ext cx="136526" cy="239232"/>
-          </a:xfrm>
-          <a:prstGeom prst="rect">
-            <a:avLst/>
-          </a:prstGeom>
-          <a:solidFill>
-            <a:srgbClr val="F5E6A3"/>
+            <a:off x="4404586" y="2179673"/>
+            <a:ext cx="132122" cy="239232"/>
+          </a:xfrm>
+          <a:prstGeom prst="rect">
+            <a:avLst/>
+          </a:prstGeom>
+          <a:solidFill>
+            <a:srgbClr val="F2A7C3"/>
           </a:solidFill>
           <a:ln w="6350">
             <a:solidFill>
@@ -2516,14 +2526,14 @@
         </p:nvSpPr>
         <p:spPr>
           <a:xfrm>
-            <a:off x="3880501" y="2179673"/>
-            <a:ext cx="136526" cy="239232"/>
-          </a:xfrm>
-          <a:prstGeom prst="rect">
-            <a:avLst/>
-          </a:prstGeom>
-          <a:solidFill>
-            <a:srgbClr val="F5E6A3"/>
+            <a:off x="4536708" y="2179673"/>
+            <a:ext cx="132122" cy="239232"/>
+          </a:xfrm>
+          <a:prstGeom prst="rect">
+            <a:avLst/>
+          </a:prstGeom>
+          <a:solidFill>
+            <a:srgbClr val="E9E7F4"/>
           </a:solidFill>
           <a:ln w="6350">
             <a:solidFill>
@@ -2541,14 +2551,14 @@
         </p:nvSpPr>
         <p:spPr>
           <a:xfrm>
-            <a:off x="4017027" y="2179673"/>
-            <a:ext cx="136526" cy="239232"/>
-          </a:xfrm>
-          <a:prstGeom prst="rect">
-            <a:avLst/>
-          </a:prstGeom>
-          <a:solidFill>
-            <a:srgbClr val="F5E6A3"/>
+            <a:off x="4668830" y="2179673"/>
+            <a:ext cx="132122" cy="239232"/>
+          </a:xfrm>
+          <a:prstGeom prst="rect">
+            <a:avLst/>
+          </a:prstGeom>
+          <a:solidFill>
+            <a:srgbClr val="F2DEEC"/>
           </a:solidFill>
           <a:ln w="6350">
             <a:solidFill>
@@ -2566,14 +2576,14 @@
         </p:nvSpPr>
         <p:spPr>
           <a:xfrm>
-            <a:off x="4153554" y="2179673"/>
-            <a:ext cx="136526" cy="239232"/>
-          </a:xfrm>
-          <a:prstGeom prst="rect">
-            <a:avLst/>
-          </a:prstGeom>
-          <a:solidFill>
-            <a:srgbClr val="F5E6A3"/>
+            <a:off x="4800953" y="2179673"/>
+            <a:ext cx="132122" cy="239232"/>
+          </a:xfrm>
+          <a:prstGeom prst="rect">
+            <a:avLst/>
+          </a:prstGeom>
+          <a:solidFill>
+            <a:srgbClr val="E6DDDB"/>
           </a:solidFill>
           <a:ln w="6350">
             <a:solidFill>
@@ -2585,64 +2595,14 @@
       </p:sp>
       <p:sp>
         <p:nvSpPr>
-          <p:cNvPr id="53" name="Shape 51"/>
-          <p:cNvSpPr/>
-          <p:nvPr/>
-        </p:nvSpPr>
-        <p:spPr>
-          <a:xfrm>
-            <a:off x="4290080" y="2179673"/>
-            <a:ext cx="136526" cy="239232"/>
-          </a:xfrm>
-          <a:prstGeom prst="rect">
-            <a:avLst/>
-          </a:prstGeom>
-          <a:solidFill>
-            <a:srgbClr val="F5E6A3"/>
-          </a:solidFill>
-          <a:ln w="6350">
-            <a:solidFill>
-              <a:srgbClr val="999999"/>
-            </a:solidFill>
-            <a:prstDash val="solid"/>
-          </a:ln>
-        </p:spPr>
-      </p:sp>
-      <p:sp>
-        <p:nvSpPr>
-          <p:cNvPr id="54" name="Shape 52"/>
-          <p:cNvSpPr/>
-          <p:nvPr/>
-        </p:nvSpPr>
-        <p:spPr>
-          <a:xfrm>
-            <a:off x="4426606" y="2179673"/>
-            <a:ext cx="136526" cy="239232"/>
-          </a:xfrm>
-          <a:prstGeom prst="rect">
-            <a:avLst/>
-          </a:prstGeom>
-          <a:solidFill>
-            <a:srgbClr val="F2A7C3"/>
-          </a:solidFill>
-          <a:ln w="6350">
-            <a:solidFill>
-              <a:srgbClr val="999999"/>
-            </a:solidFill>
-            <a:prstDash val="solid"/>
-          </a:ln>
-        </p:spPr>
-      </p:sp>
-      <p:sp>
-        <p:nvSpPr>
-          <p:cNvPr id="55" name="Text 53"/>
-          <p:cNvSpPr/>
-          <p:nvPr/>
-        </p:nvSpPr>
-        <p:spPr>
-          <a:xfrm>
-            <a:off x="4426606" y="2179673"/>
-            <a:ext cx="136526" cy="239232"/>
+          <p:cNvPr id="53" name="Text 51"/>
+          <p:cNvSpPr/>
+          <p:nvPr/>
+        </p:nvSpPr>
+        <p:spPr>
+          <a:xfrm>
+            <a:off x="4254747" y="2166973"/>
+            <a:ext cx="431800" cy="264632"/>
           </a:xfrm>
           <a:prstGeom prst="rect">
             <a:avLst/>
@@ -2651,14 +2611,14 @@
           <a:ln/>
         </p:spPr>
         <p:txBody>
-          <a:bodyPr wrap="square" lIns="0" tIns="0" rIns="0" bIns="0" rtlCol="0" anchor="ctr"/>
+          <a:bodyPr wrap="none" lIns="0" tIns="0" rIns="0" bIns="0" rtlCol="0" anchor="ctr"/>
           <a:lstStyle/>
           <a:p>
             <a:pPr algn="ctr" indent="0" marL="0">
               <a:buNone/>
             </a:pPr>
             <a:r>
-              <a:rPr lang="en-US" sz="1100" i="1" dirty="0">
+              <a:rPr lang="en-US" sz="900" i="1" dirty="0">
                 <a:solidFill>
                   <a:srgbClr val="C00000"/>
                 </a:solidFill>
@@ -2672,7 +2632,7 @@
               <a:buNone/>
             </a:pPr>
             <a:r>
-              <a:rPr lang="en-US" sz="750" i="1" baseline="-40000" dirty="0">
+              <a:rPr lang="en-US" sz="700" i="1" baseline="-40000" dirty="0">
                 <a:solidFill>
                   <a:srgbClr val="C00000"/>
                 </a:solidFill>
@@ -2682,27 +2642,80 @@
               </a:rPr>
               <a:t>2</a:t>
             </a:r>
-            <a:endParaRPr lang="en-US" sz="1100" dirty="0"/>
+            <a:endParaRPr lang="en-US" sz="900" dirty="0"/>
           </a:p>
         </p:txBody>
       </p:sp>
       <p:sp>
         <p:nvSpPr>
+          <p:cNvPr id="54" name="Shape 52"/>
+          <p:cNvSpPr/>
+          <p:nvPr/>
+        </p:nvSpPr>
+        <p:spPr>
+          <a:xfrm>
+            <a:off x="5118046" y="2179673"/>
+            <a:ext cx="132122" cy="239232"/>
+          </a:xfrm>
+          <a:prstGeom prst="rect">
+            <a:avLst/>
+          </a:prstGeom>
+          <a:solidFill>
+            <a:srgbClr val="EFE9BE"/>
+          </a:solidFill>
+          <a:ln w="6350">
+            <a:solidFill>
+              <a:srgbClr val="999999"/>
+            </a:solidFill>
+            <a:prstDash val="solid"/>
+          </a:ln>
+        </p:spPr>
+      </p:sp>
+      <p:sp>
+        <p:nvSpPr>
+          <p:cNvPr id="55" name="Shape 53"/>
+          <p:cNvSpPr/>
+          <p:nvPr/>
+        </p:nvSpPr>
+        <p:spPr>
+          <a:xfrm>
+            <a:off x="5250168" y="2179673"/>
+            <a:ext cx="132122" cy="239232"/>
+          </a:xfrm>
+          <a:prstGeom prst="rect">
+            <a:avLst/>
+          </a:prstGeom>
+          <a:solidFill>
+            <a:srgbClr val="EAF8D8"/>
+          </a:solidFill>
+          <a:ln w="6350">
+            <a:solidFill>
+              <a:srgbClr val="999999"/>
+            </a:solidFill>
+            <a:prstDash val="solid"/>
+          </a:ln>
+        </p:spPr>
+      </p:sp>
+      <p:sp>
+        <p:nvSpPr>
           <p:cNvPr id="56" name="Shape 54"/>
           <p:cNvSpPr/>
           <p:nvPr/>
         </p:nvSpPr>
         <p:spPr>
           <a:xfrm>
-            <a:off x="4708467" y="2099929"/>
-            <a:ext cx="819158" cy="465174"/>
-          </a:xfrm>
-          <a:prstGeom prst="rect">
-            <a:avLst/>
-          </a:prstGeom>
-          <a:ln w="9525">
-            <a:solidFill>
-              <a:srgbClr val="C00000"/>
+            <a:off x="5382290" y="2179673"/>
+            <a:ext cx="132122" cy="239232"/>
+          </a:xfrm>
+          <a:prstGeom prst="rect">
+            <a:avLst/>
+          </a:prstGeom>
+          <a:solidFill>
+            <a:srgbClr val="F2A7C3"/>
+          </a:solidFill>
+          <a:ln w="6350">
+            <a:solidFill>
+              <a:srgbClr val="999999"/>
             </a:solidFill>
             <a:prstDash val="solid"/>
           </a:ln>
@@ -2716,14 +2729,14 @@
         </p:nvSpPr>
         <p:spPr>
           <a:xfrm>
-            <a:off x="4708467" y="2179673"/>
-            <a:ext cx="136526" cy="239232"/>
-          </a:xfrm>
-          <a:prstGeom prst="rect">
-            <a:avLst/>
-          </a:prstGeom>
-          <a:solidFill>
-            <a:srgbClr val="F5E6A3"/>
+            <a:off x="5514413" y="2179673"/>
+            <a:ext cx="132122" cy="239232"/>
+          </a:xfrm>
+          <a:prstGeom prst="rect">
+            <a:avLst/>
+          </a:prstGeom>
+          <a:solidFill>
+            <a:srgbClr val="E9E7F4"/>
           </a:solidFill>
           <a:ln w="6350">
             <a:solidFill>
@@ -2741,14 +2754,14 @@
         </p:nvSpPr>
         <p:spPr>
           <a:xfrm>
-            <a:off x="4844993" y="2179673"/>
-            <a:ext cx="136526" cy="239232"/>
-          </a:xfrm>
-          <a:prstGeom prst="rect">
-            <a:avLst/>
-          </a:prstGeom>
-          <a:solidFill>
-            <a:srgbClr val="F5E6A3"/>
+            <a:off x="5646535" y="2179673"/>
+            <a:ext cx="132122" cy="239232"/>
+          </a:xfrm>
+          <a:prstGeom prst="rect">
+            <a:avLst/>
+          </a:prstGeom>
+          <a:solidFill>
+            <a:srgbClr val="F2DEEC"/>
           </a:solidFill>
           <a:ln w="6350">
             <a:solidFill>
@@ -2766,14 +2779,14 @@
         </p:nvSpPr>
         <p:spPr>
           <a:xfrm>
-            <a:off x="4981520" y="2179673"/>
-            <a:ext cx="136526" cy="239232"/>
-          </a:xfrm>
-          <a:prstGeom prst="rect">
-            <a:avLst/>
-          </a:prstGeom>
-          <a:solidFill>
-            <a:srgbClr val="F5E6A3"/>
+            <a:off x="5778657" y="2179673"/>
+            <a:ext cx="132122" cy="239232"/>
+          </a:xfrm>
+          <a:prstGeom prst="rect">
+            <a:avLst/>
+          </a:prstGeom>
+          <a:solidFill>
+            <a:srgbClr val="E6DDDB"/>
           </a:solidFill>
           <a:ln w="6350">
             <a:solidFill>
@@ -2785,89 +2798,14 @@
       </p:sp>
       <p:sp>
         <p:nvSpPr>
-          <p:cNvPr id="60" name="Shape 58"/>
-          <p:cNvSpPr/>
-          <p:nvPr/>
-        </p:nvSpPr>
-        <p:spPr>
-          <a:xfrm>
-            <a:off x="5118046" y="2179673"/>
-            <a:ext cx="136526" cy="239232"/>
-          </a:xfrm>
-          <a:prstGeom prst="rect">
-            <a:avLst/>
-          </a:prstGeom>
-          <a:solidFill>
-            <a:srgbClr val="F5E6A3"/>
-          </a:solidFill>
-          <a:ln w="6350">
-            <a:solidFill>
-              <a:srgbClr val="999999"/>
-            </a:solidFill>
-            <a:prstDash val="solid"/>
-          </a:ln>
-        </p:spPr>
-      </p:sp>
-      <p:sp>
-        <p:nvSpPr>
-          <p:cNvPr id="61" name="Shape 59"/>
-          <p:cNvSpPr/>
-          <p:nvPr/>
-        </p:nvSpPr>
-        <p:spPr>
-          <a:xfrm>
-            <a:off x="5254572" y="2179673"/>
-            <a:ext cx="136526" cy="239232"/>
-          </a:xfrm>
-          <a:prstGeom prst="rect">
-            <a:avLst/>
-          </a:prstGeom>
-          <a:solidFill>
-            <a:srgbClr val="F5E6A3"/>
-          </a:solidFill>
-          <a:ln w="6350">
-            <a:solidFill>
-              <a:srgbClr val="999999"/>
-            </a:solidFill>
-            <a:prstDash val="solid"/>
-          </a:ln>
-        </p:spPr>
-      </p:sp>
-      <p:sp>
-        <p:nvSpPr>
-          <p:cNvPr id="62" name="Shape 60"/>
-          <p:cNvSpPr/>
-          <p:nvPr/>
-        </p:nvSpPr>
-        <p:spPr>
-          <a:xfrm>
-            <a:off x="5391099" y="2179673"/>
-            <a:ext cx="136526" cy="239232"/>
-          </a:xfrm>
-          <a:prstGeom prst="rect">
-            <a:avLst/>
-          </a:prstGeom>
-          <a:solidFill>
-            <a:srgbClr val="F2A7C3"/>
-          </a:solidFill>
-          <a:ln w="6350">
-            <a:solidFill>
-              <a:srgbClr val="999999"/>
-            </a:solidFill>
-            <a:prstDash val="solid"/>
-          </a:ln>
-        </p:spPr>
-      </p:sp>
-      <p:sp>
-        <p:nvSpPr>
-          <p:cNvPr id="63" name="Text 61"/>
-          <p:cNvSpPr/>
-          <p:nvPr/>
-        </p:nvSpPr>
-        <p:spPr>
-          <a:xfrm>
-            <a:off x="5391099" y="2179673"/>
-            <a:ext cx="136526" cy="239232"/>
+          <p:cNvPr id="60" name="Text 58"/>
+          <p:cNvSpPr/>
+          <p:nvPr/>
+        </p:nvSpPr>
+        <p:spPr>
+          <a:xfrm>
+            <a:off x="5232452" y="2166973"/>
+            <a:ext cx="431800" cy="264632"/>
           </a:xfrm>
           <a:prstGeom prst="rect">
             <a:avLst/>
@@ -2876,14 +2814,14 @@
           <a:ln/>
         </p:spPr>
         <p:txBody>
-          <a:bodyPr wrap="square" lIns="0" tIns="0" rIns="0" bIns="0" rtlCol="0" anchor="ctr"/>
+          <a:bodyPr wrap="none" lIns="0" tIns="0" rIns="0" bIns="0" rtlCol="0" anchor="ctr"/>
           <a:lstStyle/>
           <a:p>
             <a:pPr algn="ctr" indent="0" marL="0">
               <a:buNone/>
             </a:pPr>
             <a:r>
-              <a:rPr lang="en-US" sz="1100" i="1" dirty="0">
+              <a:rPr lang="en-US" sz="900" i="1" dirty="0">
                 <a:solidFill>
                   <a:srgbClr val="C00000"/>
                 </a:solidFill>
@@ -2897,7 +2835,7 @@
               <a:buNone/>
             </a:pPr>
             <a:r>
-              <a:rPr lang="en-US" sz="750" i="1" baseline="-40000" dirty="0">
+              <a:rPr lang="en-US" sz="700" i="1" baseline="-40000" dirty="0">
                 <a:solidFill>
                   <a:srgbClr val="C00000"/>
                 </a:solidFill>
@@ -2907,27 +2845,105 @@
               </a:rPr>
               <a:t>3</a:t>
             </a:r>
-            <a:endParaRPr lang="en-US" sz="1100" dirty="0"/>
+            <a:endParaRPr lang="en-US" sz="900" dirty="0"/>
           </a:p>
         </p:txBody>
       </p:sp>
       <p:sp>
         <p:nvSpPr>
+          <p:cNvPr id="61" name="Shape 59"/>
+          <p:cNvSpPr/>
+          <p:nvPr/>
+        </p:nvSpPr>
+        <p:spPr>
+          <a:xfrm>
+            <a:off x="6082538" y="2179673"/>
+            <a:ext cx="132122" cy="239232"/>
+          </a:xfrm>
+          <a:prstGeom prst="rect">
+            <a:avLst/>
+          </a:prstGeom>
+          <a:solidFill>
+            <a:srgbClr val="EFE9BE"/>
+          </a:solidFill>
+          <a:ln w="6350">
+            <a:solidFill>
+              <a:srgbClr val="999999"/>
+            </a:solidFill>
+            <a:prstDash val="solid"/>
+          </a:ln>
+        </p:spPr>
+      </p:sp>
+      <p:sp>
+        <p:nvSpPr>
+          <p:cNvPr id="62" name="Shape 60"/>
+          <p:cNvSpPr/>
+          <p:nvPr/>
+        </p:nvSpPr>
+        <p:spPr>
+          <a:xfrm>
+            <a:off x="6214661" y="2179673"/>
+            <a:ext cx="132122" cy="239232"/>
+          </a:xfrm>
+          <a:prstGeom prst="rect">
+            <a:avLst/>
+          </a:prstGeom>
+          <a:solidFill>
+            <a:srgbClr val="EAF8D8"/>
+          </a:solidFill>
+          <a:ln w="6350">
+            <a:solidFill>
+              <a:srgbClr val="999999"/>
+            </a:solidFill>
+            <a:prstDash val="solid"/>
+          </a:ln>
+        </p:spPr>
+      </p:sp>
+      <p:sp>
+        <p:nvSpPr>
+          <p:cNvPr id="63" name="Shape 61"/>
+          <p:cNvSpPr/>
+          <p:nvPr/>
+        </p:nvSpPr>
+        <p:spPr>
+          <a:xfrm>
+            <a:off x="6346783" y="2179673"/>
+            <a:ext cx="132122" cy="239232"/>
+          </a:xfrm>
+          <a:prstGeom prst="rect">
+            <a:avLst/>
+          </a:prstGeom>
+          <a:solidFill>
+            <a:srgbClr val="F2A7C3"/>
+          </a:solidFill>
+          <a:ln w="6350">
+            <a:solidFill>
+              <a:srgbClr val="999999"/>
+            </a:solidFill>
+            <a:prstDash val="solid"/>
+          </a:ln>
+        </p:spPr>
+      </p:sp>
+      <p:sp>
+        <p:nvSpPr>
           <p:cNvPr id="64" name="Shape 62"/>
           <p:cNvSpPr/>
           <p:nvPr/>
         </p:nvSpPr>
         <p:spPr>
           <a:xfrm>
-            <a:off x="5672959" y="2099929"/>
-            <a:ext cx="819158" cy="465174"/>
-          </a:xfrm>
-          <a:prstGeom prst="rect">
-            <a:avLst/>
-          </a:prstGeom>
-          <a:ln w="9525">
-            <a:solidFill>
-              <a:srgbClr val="C00000"/>
+            <a:off x="6478905" y="2179673"/>
+            <a:ext cx="132122" cy="239232"/>
+          </a:xfrm>
+          <a:prstGeom prst="rect">
+            <a:avLst/>
+          </a:prstGeom>
+          <a:solidFill>
+            <a:srgbClr val="E9E7F4"/>
+          </a:solidFill>
+          <a:ln w="6350">
+            <a:solidFill>
+              <a:srgbClr val="999999"/>
             </a:solidFill>
             <a:prstDash val="solid"/>
           </a:ln>
@@ -2941,14 +2957,14 @@
         </p:nvSpPr>
         <p:spPr>
           <a:xfrm>
-            <a:off x="5672959" y="2179673"/>
-            <a:ext cx="136526" cy="239232"/>
-          </a:xfrm>
-          <a:prstGeom prst="rect">
-            <a:avLst/>
-          </a:prstGeom>
-          <a:solidFill>
-            <a:srgbClr val="F5E6A3"/>
+            <a:off x="6611027" y="2179673"/>
+            <a:ext cx="132122" cy="239232"/>
+          </a:xfrm>
+          <a:prstGeom prst="rect">
+            <a:avLst/>
+          </a:prstGeom>
+          <a:solidFill>
+            <a:srgbClr val="F2DEEC"/>
           </a:solidFill>
           <a:ln w="6350">
             <a:solidFill>
@@ -2966,14 +2982,14 @@
         </p:nvSpPr>
         <p:spPr>
           <a:xfrm>
-            <a:off x="5809486" y="2179673"/>
-            <a:ext cx="136526" cy="239232"/>
-          </a:xfrm>
-          <a:prstGeom prst="rect">
-            <a:avLst/>
-          </a:prstGeom>
-          <a:solidFill>
-            <a:srgbClr val="F5E6A3"/>
+            <a:off x="6743150" y="2179673"/>
+            <a:ext cx="132122" cy="239232"/>
+          </a:xfrm>
+          <a:prstGeom prst="rect">
+            <a:avLst/>
+          </a:prstGeom>
+          <a:solidFill>
+            <a:srgbClr val="E6DDDB"/>
           </a:solidFill>
           <a:ln w="6350">
             <a:solidFill>
@@ -2985,114 +3001,14 @@
       </p:sp>
       <p:sp>
         <p:nvSpPr>
-          <p:cNvPr id="67" name="Shape 65"/>
-          <p:cNvSpPr/>
-          <p:nvPr/>
-        </p:nvSpPr>
-        <p:spPr>
-          <a:xfrm>
-            <a:off x="5946012" y="2179673"/>
-            <a:ext cx="136526" cy="239232"/>
-          </a:xfrm>
-          <a:prstGeom prst="rect">
-            <a:avLst/>
-          </a:prstGeom>
-          <a:solidFill>
-            <a:srgbClr val="F5E6A3"/>
-          </a:solidFill>
-          <a:ln w="6350">
-            <a:solidFill>
-              <a:srgbClr val="999999"/>
-            </a:solidFill>
-            <a:prstDash val="solid"/>
-          </a:ln>
-        </p:spPr>
-      </p:sp>
-      <p:sp>
-        <p:nvSpPr>
-          <p:cNvPr id="68" name="Shape 66"/>
-          <p:cNvSpPr/>
-          <p:nvPr/>
-        </p:nvSpPr>
-        <p:spPr>
-          <a:xfrm>
-            <a:off x="6082538" y="2179673"/>
-            <a:ext cx="136526" cy="239232"/>
-          </a:xfrm>
-          <a:prstGeom prst="rect">
-            <a:avLst/>
-          </a:prstGeom>
-          <a:solidFill>
-            <a:srgbClr val="F5E6A3"/>
-          </a:solidFill>
-          <a:ln w="6350">
-            <a:solidFill>
-              <a:srgbClr val="999999"/>
-            </a:solidFill>
-            <a:prstDash val="solid"/>
-          </a:ln>
-        </p:spPr>
-      </p:sp>
-      <p:sp>
-        <p:nvSpPr>
-          <p:cNvPr id="69" name="Shape 67"/>
-          <p:cNvSpPr/>
-          <p:nvPr/>
-        </p:nvSpPr>
-        <p:spPr>
-          <a:xfrm>
-            <a:off x="6219065" y="2179673"/>
-            <a:ext cx="136526" cy="239232"/>
-          </a:xfrm>
-          <a:prstGeom prst="rect">
-            <a:avLst/>
-          </a:prstGeom>
-          <a:solidFill>
-            <a:srgbClr val="F5E6A3"/>
-          </a:solidFill>
-          <a:ln w="6350">
-            <a:solidFill>
-              <a:srgbClr val="999999"/>
-            </a:solidFill>
-            <a:prstDash val="solid"/>
-          </a:ln>
-        </p:spPr>
-      </p:sp>
-      <p:sp>
-        <p:nvSpPr>
-          <p:cNvPr id="70" name="Shape 68"/>
-          <p:cNvSpPr/>
-          <p:nvPr/>
-        </p:nvSpPr>
-        <p:spPr>
-          <a:xfrm>
-            <a:off x="6355591" y="2179673"/>
-            <a:ext cx="136526" cy="239232"/>
-          </a:xfrm>
-          <a:prstGeom prst="rect">
-            <a:avLst/>
-          </a:prstGeom>
-          <a:solidFill>
-            <a:srgbClr val="F2A7C3"/>
-          </a:solidFill>
-          <a:ln w="6350">
-            <a:solidFill>
-              <a:srgbClr val="999999"/>
-            </a:solidFill>
-            <a:prstDash val="solid"/>
-          </a:ln>
-        </p:spPr>
-      </p:sp>
-      <p:sp>
-        <p:nvSpPr>
-          <p:cNvPr id="71" name="Text 69"/>
-          <p:cNvSpPr/>
-          <p:nvPr/>
-        </p:nvSpPr>
-        <p:spPr>
-          <a:xfrm>
-            <a:off x="6355591" y="2179673"/>
-            <a:ext cx="136526" cy="239232"/>
+          <p:cNvPr id="67" name="Text 65"/>
+          <p:cNvSpPr/>
+          <p:nvPr/>
+        </p:nvSpPr>
+        <p:spPr>
+          <a:xfrm>
+            <a:off x="6196944" y="2166973"/>
+            <a:ext cx="431800" cy="264632"/>
           </a:xfrm>
           <a:prstGeom prst="rect">
             <a:avLst/>
@@ -3101,14 +3017,14 @@
           <a:ln/>
         </p:spPr>
         <p:txBody>
-          <a:bodyPr wrap="square" lIns="0" tIns="0" rIns="0" bIns="0" rtlCol="0" anchor="ctr"/>
+          <a:bodyPr wrap="none" lIns="0" tIns="0" rIns="0" bIns="0" rtlCol="0" anchor="ctr"/>
           <a:lstStyle/>
           <a:p>
             <a:pPr algn="ctr" indent="0" marL="0">
               <a:buNone/>
             </a:pPr>
             <a:r>
-              <a:rPr lang="en-US" sz="1100" i="1" dirty="0">
+              <a:rPr lang="en-US" sz="900" i="1" dirty="0">
                 <a:solidFill>
                   <a:srgbClr val="C00000"/>
                 </a:solidFill>
@@ -3122,7 +3038,7 @@
               <a:buNone/>
             </a:pPr>
             <a:r>
-              <a:rPr lang="en-US" sz="750" i="1" baseline="-40000" dirty="0">
+              <a:rPr lang="en-US" sz="700" i="1" baseline="-40000" dirty="0">
                 <a:solidFill>
                   <a:srgbClr val="C00000"/>
                 </a:solidFill>
@@ -3132,27 +3048,130 @@
               </a:rPr>
               <a:t>4</a:t>
             </a:r>
-            <a:endParaRPr lang="en-US" sz="1100" dirty="0"/>
+            <a:endParaRPr lang="en-US" sz="900" dirty="0"/>
           </a:p>
         </p:txBody>
       </p:sp>
       <p:sp>
         <p:nvSpPr>
+          <p:cNvPr id="68" name="Shape 66"/>
+          <p:cNvSpPr/>
+          <p:nvPr/>
+        </p:nvSpPr>
+        <p:spPr>
+          <a:xfrm>
+            <a:off x="7033819" y="2179673"/>
+            <a:ext cx="132122" cy="239232"/>
+          </a:xfrm>
+          <a:prstGeom prst="rect">
+            <a:avLst/>
+          </a:prstGeom>
+          <a:solidFill>
+            <a:srgbClr val="EFE9BE"/>
+          </a:solidFill>
+          <a:ln w="6350">
+            <a:solidFill>
+              <a:srgbClr val="999999"/>
+            </a:solidFill>
+            <a:prstDash val="solid"/>
+          </a:ln>
+        </p:spPr>
+      </p:sp>
+      <p:sp>
+        <p:nvSpPr>
+          <p:cNvPr id="69" name="Shape 67"/>
+          <p:cNvSpPr/>
+          <p:nvPr/>
+        </p:nvSpPr>
+        <p:spPr>
+          <a:xfrm>
+            <a:off x="7165941" y="2179673"/>
+            <a:ext cx="132122" cy="239232"/>
+          </a:xfrm>
+          <a:prstGeom prst="rect">
+            <a:avLst/>
+          </a:prstGeom>
+          <a:solidFill>
+            <a:srgbClr val="EAF8D8"/>
+          </a:solidFill>
+          <a:ln w="6350">
+            <a:solidFill>
+              <a:srgbClr val="999999"/>
+            </a:solidFill>
+            <a:prstDash val="solid"/>
+          </a:ln>
+        </p:spPr>
+      </p:sp>
+      <p:sp>
+        <p:nvSpPr>
+          <p:cNvPr id="70" name="Shape 68"/>
+          <p:cNvSpPr/>
+          <p:nvPr/>
+        </p:nvSpPr>
+        <p:spPr>
+          <a:xfrm>
+            <a:off x="7298063" y="2179673"/>
+            <a:ext cx="132122" cy="239232"/>
+          </a:xfrm>
+          <a:prstGeom prst="rect">
+            <a:avLst/>
+          </a:prstGeom>
+          <a:solidFill>
+            <a:srgbClr val="F2A7C3"/>
+          </a:solidFill>
+          <a:ln w="6350">
+            <a:solidFill>
+              <a:srgbClr val="999999"/>
+            </a:solidFill>
+            <a:prstDash val="solid"/>
+          </a:ln>
+        </p:spPr>
+      </p:sp>
+      <p:sp>
+        <p:nvSpPr>
+          <p:cNvPr id="71" name="Shape 69"/>
+          <p:cNvSpPr/>
+          <p:nvPr/>
+        </p:nvSpPr>
+        <p:spPr>
+          <a:xfrm>
+            <a:off x="7430185" y="2179673"/>
+            <a:ext cx="132122" cy="239232"/>
+          </a:xfrm>
+          <a:prstGeom prst="rect">
+            <a:avLst/>
+          </a:prstGeom>
+          <a:solidFill>
+            <a:srgbClr val="E9E7F4"/>
+          </a:solidFill>
+          <a:ln w="6350">
+            <a:solidFill>
+              <a:srgbClr val="999999"/>
+            </a:solidFill>
+            <a:prstDash val="solid"/>
+          </a:ln>
+        </p:spPr>
+      </p:sp>
+      <p:sp>
+        <p:nvSpPr>
           <p:cNvPr id="72" name="Shape 70"/>
           <p:cNvSpPr/>
           <p:nvPr/>
         </p:nvSpPr>
         <p:spPr>
           <a:xfrm>
-            <a:off x="6650664" y="2099929"/>
-            <a:ext cx="805946" cy="465174"/>
-          </a:xfrm>
-          <a:prstGeom prst="rect">
-            <a:avLst/>
-          </a:prstGeom>
-          <a:ln w="9525">
-            <a:solidFill>
-              <a:srgbClr val="C00000"/>
+            <a:off x="7562307" y="2179673"/>
+            <a:ext cx="132122" cy="239232"/>
+          </a:xfrm>
+          <a:prstGeom prst="rect">
+            <a:avLst/>
+          </a:prstGeom>
+          <a:solidFill>
+            <a:srgbClr val="F2DEEC"/>
+          </a:solidFill>
+          <a:ln w="6350">
+            <a:solidFill>
+              <a:srgbClr val="999999"/>
             </a:solidFill>
             <a:prstDash val="solid"/>
           </a:ln>
@@ -3166,14 +3185,14 @@
         </p:nvSpPr>
         <p:spPr>
           <a:xfrm>
-            <a:off x="6650664" y="2179673"/>
-            <a:ext cx="134324" cy="239232"/>
-          </a:xfrm>
-          <a:prstGeom prst="rect">
-            <a:avLst/>
-          </a:prstGeom>
-          <a:solidFill>
-            <a:srgbClr val="F5E6A3"/>
+            <a:off x="7694430" y="2179673"/>
+            <a:ext cx="132122" cy="239232"/>
+          </a:xfrm>
+          <a:prstGeom prst="rect">
+            <a:avLst/>
+          </a:prstGeom>
+          <a:solidFill>
+            <a:srgbClr val="E6DDDB"/>
           </a:solidFill>
           <a:ln w="6350">
             <a:solidFill>
@@ -3185,139 +3204,14 @@
       </p:sp>
       <p:sp>
         <p:nvSpPr>
-          <p:cNvPr id="74" name="Shape 72"/>
-          <p:cNvSpPr/>
-          <p:nvPr/>
-        </p:nvSpPr>
-        <p:spPr>
-          <a:xfrm>
-            <a:off x="6784988" y="2179673"/>
-            <a:ext cx="134324" cy="239232"/>
-          </a:xfrm>
-          <a:prstGeom prst="rect">
-            <a:avLst/>
-          </a:prstGeom>
-          <a:solidFill>
-            <a:srgbClr val="F5E6A3"/>
-          </a:solidFill>
-          <a:ln w="6350">
-            <a:solidFill>
-              <a:srgbClr val="999999"/>
-            </a:solidFill>
-            <a:prstDash val="solid"/>
-          </a:ln>
-        </p:spPr>
-      </p:sp>
-      <p:sp>
-        <p:nvSpPr>
-          <p:cNvPr id="75" name="Shape 73"/>
-          <p:cNvSpPr/>
-          <p:nvPr/>
-        </p:nvSpPr>
-        <p:spPr>
-          <a:xfrm>
-            <a:off x="6919313" y="2179673"/>
-            <a:ext cx="134324" cy="239232"/>
-          </a:xfrm>
-          <a:prstGeom prst="rect">
-            <a:avLst/>
-          </a:prstGeom>
-          <a:solidFill>
-            <a:srgbClr val="F5E6A3"/>
-          </a:solidFill>
-          <a:ln w="6350">
-            <a:solidFill>
-              <a:srgbClr val="999999"/>
-            </a:solidFill>
-            <a:prstDash val="solid"/>
-          </a:ln>
-        </p:spPr>
-      </p:sp>
-      <p:sp>
-        <p:nvSpPr>
-          <p:cNvPr id="76" name="Shape 74"/>
-          <p:cNvSpPr/>
-          <p:nvPr/>
-        </p:nvSpPr>
-        <p:spPr>
-          <a:xfrm>
-            <a:off x="7053637" y="2179673"/>
-            <a:ext cx="134324" cy="239232"/>
-          </a:xfrm>
-          <a:prstGeom prst="rect">
-            <a:avLst/>
-          </a:prstGeom>
-          <a:solidFill>
-            <a:srgbClr val="F5E6A3"/>
-          </a:solidFill>
-          <a:ln w="6350">
-            <a:solidFill>
-              <a:srgbClr val="999999"/>
-            </a:solidFill>
-            <a:prstDash val="solid"/>
-          </a:ln>
-        </p:spPr>
-      </p:sp>
-      <p:sp>
-        <p:nvSpPr>
-          <p:cNvPr id="77" name="Shape 75"/>
-          <p:cNvSpPr/>
-          <p:nvPr/>
-        </p:nvSpPr>
-        <p:spPr>
-          <a:xfrm>
-            <a:off x="7187961" y="2179673"/>
-            <a:ext cx="134324" cy="239232"/>
-          </a:xfrm>
-          <a:prstGeom prst="rect">
-            <a:avLst/>
-          </a:prstGeom>
-          <a:solidFill>
-            <a:srgbClr val="F5E6A3"/>
-          </a:solidFill>
-          <a:ln w="6350">
-            <a:solidFill>
-              <a:srgbClr val="999999"/>
-            </a:solidFill>
-            <a:prstDash val="solid"/>
-          </a:ln>
-        </p:spPr>
-      </p:sp>
-      <p:sp>
-        <p:nvSpPr>
-          <p:cNvPr id="78" name="Shape 76"/>
-          <p:cNvSpPr/>
-          <p:nvPr/>
-        </p:nvSpPr>
-        <p:spPr>
-          <a:xfrm>
-            <a:off x="7322285" y="2179673"/>
-            <a:ext cx="134324" cy="239232"/>
-          </a:xfrm>
-          <a:prstGeom prst="rect">
-            <a:avLst/>
-          </a:prstGeom>
-          <a:solidFill>
-            <a:srgbClr val="F2A7C3"/>
-          </a:solidFill>
-          <a:ln w="6350">
-            <a:solidFill>
-              <a:srgbClr val="999999"/>
-            </a:solidFill>
-            <a:prstDash val="solid"/>
-          </a:ln>
-        </p:spPr>
-      </p:sp>
-      <p:sp>
-        <p:nvSpPr>
-          <p:cNvPr id="79" name="Text 77"/>
-          <p:cNvSpPr/>
-          <p:nvPr/>
-        </p:nvSpPr>
-        <p:spPr>
-          <a:xfrm>
-            <a:off x="7322285" y="2179673"/>
-            <a:ext cx="134324" cy="239232"/>
+          <p:cNvPr id="74" name="Text 72"/>
+          <p:cNvSpPr/>
+          <p:nvPr/>
+        </p:nvSpPr>
+        <p:spPr>
+          <a:xfrm>
+            <a:off x="7148224" y="2166973"/>
+            <a:ext cx="431800" cy="264632"/>
           </a:xfrm>
           <a:prstGeom prst="rect">
             <a:avLst/>
@@ -3326,14 +3220,14 @@
           <a:ln/>
         </p:spPr>
         <p:txBody>
-          <a:bodyPr wrap="square" lIns="0" tIns="0" rIns="0" bIns="0" rtlCol="0" anchor="ctr"/>
+          <a:bodyPr wrap="none" lIns="0" tIns="0" rIns="0" bIns="0" rtlCol="0" anchor="ctr"/>
           <a:lstStyle/>
           <a:p>
             <a:pPr algn="ctr" indent="0" marL="0">
               <a:buNone/>
             </a:pPr>
             <a:r>
-              <a:rPr lang="en-US" sz="1100" i="1" dirty="0">
+              <a:rPr lang="en-US" sz="900" i="1" dirty="0">
                 <a:solidFill>
                   <a:srgbClr val="C00000"/>
                 </a:solidFill>
@@ -3347,7 +3241,7 @@
               <a:buNone/>
             </a:pPr>
             <a:r>
-              <a:rPr lang="en-US" sz="750" i="1" baseline="-40000" dirty="0">
+              <a:rPr lang="en-US" sz="700" i="1" baseline="-40000" dirty="0">
                 <a:solidFill>
                   <a:srgbClr val="C00000"/>
                 </a:solidFill>
@@ -3357,48 +3251,151 @@
               </a:rPr>
               <a:t>5</a:t>
             </a:r>
-            <a:endParaRPr lang="en-US" sz="1100" dirty="0"/>
+            <a:endParaRPr lang="en-US" sz="900" dirty="0"/>
           </a:p>
         </p:txBody>
       </p:sp>
       <p:sp>
         <p:nvSpPr>
+          <p:cNvPr id="75" name="Shape 73"/>
+          <p:cNvSpPr/>
+          <p:nvPr/>
+        </p:nvSpPr>
+        <p:spPr>
+          <a:xfrm>
+            <a:off x="9504505" y="2179673"/>
+            <a:ext cx="132122" cy="239232"/>
+          </a:xfrm>
+          <a:prstGeom prst="rect">
+            <a:avLst/>
+          </a:prstGeom>
+          <a:solidFill>
+            <a:srgbClr val="EFE9BE"/>
+          </a:solidFill>
+          <a:ln w="6350">
+            <a:solidFill>
+              <a:srgbClr val="999999"/>
+            </a:solidFill>
+            <a:prstDash val="solid"/>
+          </a:ln>
+        </p:spPr>
+      </p:sp>
+      <p:sp>
+        <p:nvSpPr>
+          <p:cNvPr id="76" name="Shape 74"/>
+          <p:cNvSpPr/>
+          <p:nvPr/>
+        </p:nvSpPr>
+        <p:spPr>
+          <a:xfrm>
+            <a:off x="9636627" y="2179673"/>
+            <a:ext cx="132122" cy="239232"/>
+          </a:xfrm>
+          <a:prstGeom prst="rect">
+            <a:avLst/>
+          </a:prstGeom>
+          <a:solidFill>
+            <a:srgbClr val="EAF8D8"/>
+          </a:solidFill>
+          <a:ln w="6350">
+            <a:solidFill>
+              <a:srgbClr val="999999"/>
+            </a:solidFill>
+            <a:prstDash val="solid"/>
+          </a:ln>
+        </p:spPr>
+      </p:sp>
+      <p:sp>
+        <p:nvSpPr>
+          <p:cNvPr id="77" name="Shape 75"/>
+          <p:cNvSpPr/>
+          <p:nvPr/>
+        </p:nvSpPr>
+        <p:spPr>
+          <a:xfrm>
+            <a:off x="9768749" y="2179673"/>
+            <a:ext cx="132122" cy="239232"/>
+          </a:xfrm>
+          <a:prstGeom prst="rect">
+            <a:avLst/>
+          </a:prstGeom>
+          <a:solidFill>
+            <a:srgbClr val="F2A7C3"/>
+          </a:solidFill>
+          <a:ln w="6350">
+            <a:solidFill>
+              <a:srgbClr val="999999"/>
+            </a:solidFill>
+            <a:prstDash val="solid"/>
+          </a:ln>
+        </p:spPr>
+      </p:sp>
+      <p:sp>
+        <p:nvSpPr>
+          <p:cNvPr id="78" name="Shape 76"/>
+          <p:cNvSpPr/>
+          <p:nvPr/>
+        </p:nvSpPr>
+        <p:spPr>
+          <a:xfrm>
+            <a:off x="9900871" y="2179673"/>
+            <a:ext cx="132122" cy="239232"/>
+          </a:xfrm>
+          <a:prstGeom prst="rect">
+            <a:avLst/>
+          </a:prstGeom>
+          <a:solidFill>
+            <a:srgbClr val="E9E7F4"/>
+          </a:solidFill>
+          <a:ln w="6350">
+            <a:solidFill>
+              <a:srgbClr val="999999"/>
+            </a:solidFill>
+            <a:prstDash val="solid"/>
+          </a:ln>
+        </p:spPr>
+      </p:sp>
+      <p:sp>
+        <p:nvSpPr>
+          <p:cNvPr id="79" name="Shape 77"/>
+          <p:cNvSpPr/>
+          <p:nvPr/>
+        </p:nvSpPr>
+        <p:spPr>
+          <a:xfrm>
+            <a:off x="10032994" y="2179673"/>
+            <a:ext cx="132122" cy="239232"/>
+          </a:xfrm>
+          <a:prstGeom prst="rect">
+            <a:avLst/>
+          </a:prstGeom>
+          <a:solidFill>
+            <a:srgbClr val="F2DEEC"/>
+          </a:solidFill>
+          <a:ln w="6350">
+            <a:solidFill>
+              <a:srgbClr val="999999"/>
+            </a:solidFill>
+            <a:prstDash val="solid"/>
+          </a:ln>
+        </p:spPr>
+      </p:sp>
+      <p:sp>
+        <p:nvSpPr>
           <p:cNvPr id="80" name="Shape 78"/>
           <p:cNvSpPr/>
           <p:nvPr/>
         </p:nvSpPr>
         <p:spPr>
           <a:xfrm>
-            <a:off x="9134562" y="2099929"/>
-            <a:ext cx="832370" cy="465174"/>
-          </a:xfrm>
-          <a:prstGeom prst="rect">
-            <a:avLst/>
-          </a:prstGeom>
-          <a:ln w="9525">
-            <a:solidFill>
-              <a:srgbClr val="C00000"/>
-            </a:solidFill>
-            <a:prstDash val="solid"/>
-          </a:ln>
-        </p:spPr>
-      </p:sp>
-      <p:sp>
-        <p:nvSpPr>
-          <p:cNvPr id="81" name="Shape 79"/>
-          <p:cNvSpPr/>
-          <p:nvPr/>
-        </p:nvSpPr>
-        <p:spPr>
-          <a:xfrm>
-            <a:off x="9134562" y="2179673"/>
-            <a:ext cx="138728" cy="239232"/>
-          </a:xfrm>
-          <a:prstGeom prst="rect">
-            <a:avLst/>
-          </a:prstGeom>
-          <a:solidFill>
-            <a:srgbClr val="F5E6A3"/>
+            <a:off x="10165116" y="2179673"/>
+            <a:ext cx="132122" cy="239232"/>
+          </a:xfrm>
+          <a:prstGeom prst="rect">
+            <a:avLst/>
+          </a:prstGeom>
+          <a:solidFill>
+            <a:srgbClr val="E6DDDB"/>
           </a:solidFill>
           <a:ln w="6350">
             <a:solidFill>
@@ -3410,139 +3407,14 @@
       </p:sp>
       <p:sp>
         <p:nvSpPr>
-          <p:cNvPr id="82" name="Shape 80"/>
-          <p:cNvSpPr/>
-          <p:nvPr/>
-        </p:nvSpPr>
-        <p:spPr>
-          <a:xfrm>
-            <a:off x="9273291" y="2179673"/>
-            <a:ext cx="138728" cy="239232"/>
-          </a:xfrm>
-          <a:prstGeom prst="rect">
-            <a:avLst/>
-          </a:prstGeom>
-          <a:solidFill>
-            <a:srgbClr val="F5E6A3"/>
-          </a:solidFill>
-          <a:ln w="6350">
-            <a:solidFill>
-              <a:srgbClr val="999999"/>
-            </a:solidFill>
-            <a:prstDash val="solid"/>
-          </a:ln>
-        </p:spPr>
-      </p:sp>
-      <p:sp>
-        <p:nvSpPr>
-          <p:cNvPr id="83" name="Shape 81"/>
-          <p:cNvSpPr/>
-          <p:nvPr/>
-        </p:nvSpPr>
-        <p:spPr>
-          <a:xfrm>
-            <a:off x="9412019" y="2179673"/>
-            <a:ext cx="138728" cy="239232"/>
-          </a:xfrm>
-          <a:prstGeom prst="rect">
-            <a:avLst/>
-          </a:prstGeom>
-          <a:solidFill>
-            <a:srgbClr val="F5E6A3"/>
-          </a:solidFill>
-          <a:ln w="6350">
-            <a:solidFill>
-              <a:srgbClr val="999999"/>
-            </a:solidFill>
-            <a:prstDash val="solid"/>
-          </a:ln>
-        </p:spPr>
-      </p:sp>
-      <p:sp>
-        <p:nvSpPr>
-          <p:cNvPr id="84" name="Shape 82"/>
-          <p:cNvSpPr/>
-          <p:nvPr/>
-        </p:nvSpPr>
-        <p:spPr>
-          <a:xfrm>
-            <a:off x="9550747" y="2179673"/>
-            <a:ext cx="138728" cy="239232"/>
-          </a:xfrm>
-          <a:prstGeom prst="rect">
-            <a:avLst/>
-          </a:prstGeom>
-          <a:solidFill>
-            <a:srgbClr val="F5E6A3"/>
-          </a:solidFill>
-          <a:ln w="6350">
-            <a:solidFill>
-              <a:srgbClr val="999999"/>
-            </a:solidFill>
-            <a:prstDash val="solid"/>
-          </a:ln>
-        </p:spPr>
-      </p:sp>
-      <p:sp>
-        <p:nvSpPr>
-          <p:cNvPr id="85" name="Shape 83"/>
-          <p:cNvSpPr/>
-          <p:nvPr/>
-        </p:nvSpPr>
-        <p:spPr>
-          <a:xfrm>
-            <a:off x="9689476" y="2179673"/>
-            <a:ext cx="138728" cy="239232"/>
-          </a:xfrm>
-          <a:prstGeom prst="rect">
-            <a:avLst/>
-          </a:prstGeom>
-          <a:solidFill>
-            <a:srgbClr val="F5E6A3"/>
-          </a:solidFill>
-          <a:ln w="6350">
-            <a:solidFill>
-              <a:srgbClr val="999999"/>
-            </a:solidFill>
-            <a:prstDash val="solid"/>
-          </a:ln>
-        </p:spPr>
-      </p:sp>
-      <p:sp>
-        <p:nvSpPr>
-          <p:cNvPr id="86" name="Shape 84"/>
-          <p:cNvSpPr/>
-          <p:nvPr/>
-        </p:nvSpPr>
-        <p:spPr>
-          <a:xfrm>
-            <a:off x="9828204" y="2179673"/>
-            <a:ext cx="138728" cy="239232"/>
-          </a:xfrm>
-          <a:prstGeom prst="rect">
-            <a:avLst/>
-          </a:prstGeom>
-          <a:solidFill>
-            <a:srgbClr val="F2A7C3"/>
-          </a:solidFill>
-          <a:ln w="6350">
-            <a:solidFill>
-              <a:srgbClr val="999999"/>
-            </a:solidFill>
-            <a:prstDash val="solid"/>
-          </a:ln>
-        </p:spPr>
-      </p:sp>
-      <p:sp>
-        <p:nvSpPr>
-          <p:cNvPr id="87" name="Text 85"/>
-          <p:cNvSpPr/>
-          <p:nvPr/>
-        </p:nvSpPr>
-        <p:spPr>
-          <a:xfrm>
-            <a:off x="9828204" y="2179673"/>
-            <a:ext cx="138728" cy="239232"/>
+          <p:cNvPr id="81" name="Text 79"/>
+          <p:cNvSpPr/>
+          <p:nvPr/>
+        </p:nvSpPr>
+        <p:spPr>
+          <a:xfrm>
+            <a:off x="9618910" y="2166973"/>
+            <a:ext cx="431800" cy="264632"/>
           </a:xfrm>
           <a:prstGeom prst="rect">
             <a:avLst/>
@@ -3551,14 +3423,14 @@
           <a:ln/>
         </p:spPr>
         <p:txBody>
-          <a:bodyPr wrap="square" lIns="0" tIns="0" rIns="0" bIns="0" rtlCol="0" anchor="ctr"/>
+          <a:bodyPr wrap="none" lIns="0" tIns="0" rIns="0" bIns="0" rtlCol="0" anchor="ctr"/>
           <a:lstStyle/>
           <a:p>
             <a:pPr algn="ctr" indent="0" marL="0">
               <a:buNone/>
             </a:pPr>
             <a:r>
-              <a:rPr lang="en-US" sz="1100" i="1" dirty="0">
+              <a:rPr lang="en-US" sz="900" i="1" dirty="0">
                 <a:solidFill>
                   <a:srgbClr val="C00000"/>
                 </a:solidFill>
@@ -3572,7 +3444,7 @@
               <a:buNone/>
             </a:pPr>
             <a:r>
-              <a:rPr lang="en-US" sz="750" i="1" baseline="-40000" dirty="0">
+              <a:rPr lang="en-US" sz="700" i="1" baseline="-40000" dirty="0">
                 <a:solidFill>
                   <a:srgbClr val="C00000"/>
                 </a:solidFill>
@@ -3582,48 +3454,26 @@
               </a:rPr>
               <a:t>N-2</a:t>
             </a:r>
-            <a:endParaRPr lang="en-US" sz="1100" dirty="0"/>
+            <a:endParaRPr lang="en-US" sz="900" dirty="0"/>
           </a:p>
         </p:txBody>
       </p:sp>
       <p:sp>
         <p:nvSpPr>
-          <p:cNvPr id="88" name="Shape 86"/>
-          <p:cNvSpPr/>
-          <p:nvPr/>
-        </p:nvSpPr>
-        <p:spPr>
-          <a:xfrm>
-            <a:off x="10125479" y="2099929"/>
-            <a:ext cx="858795" cy="465174"/>
-          </a:xfrm>
-          <a:prstGeom prst="rect">
-            <a:avLst/>
-          </a:prstGeom>
-          <a:ln w="9525">
-            <a:solidFill>
-              <a:srgbClr val="C00000"/>
-            </a:solidFill>
-            <a:prstDash val="solid"/>
-          </a:ln>
-        </p:spPr>
-      </p:sp>
-      <p:sp>
-        <p:nvSpPr>
-          <p:cNvPr id="89" name="Shape 87"/>
-          <p:cNvSpPr/>
-          <p:nvPr/>
-        </p:nvSpPr>
-        <p:spPr>
-          <a:xfrm>
-            <a:off x="10125479" y="2179673"/>
-            <a:ext cx="143132" cy="239232"/>
-          </a:xfrm>
-          <a:prstGeom prst="rect">
-            <a:avLst/>
-          </a:prstGeom>
-          <a:solidFill>
-            <a:srgbClr val="F5E6A3"/>
+          <p:cNvPr id="82" name="Shape 80"/>
+          <p:cNvSpPr/>
+          <p:nvPr/>
+        </p:nvSpPr>
+        <p:spPr>
+          <a:xfrm>
+            <a:off x="10535058" y="2179673"/>
+            <a:ext cx="132122" cy="239232"/>
+          </a:xfrm>
+          <a:prstGeom prst="rect">
+            <a:avLst/>
+          </a:prstGeom>
+          <a:solidFill>
+            <a:srgbClr val="EFE9BE"/>
           </a:solidFill>
           <a:ln w="6350">
             <a:solidFill>
@@ -3635,20 +3485,20 @@
       </p:sp>
       <p:sp>
         <p:nvSpPr>
-          <p:cNvPr id="90" name="Shape 88"/>
-          <p:cNvSpPr/>
-          <p:nvPr/>
-        </p:nvSpPr>
-        <p:spPr>
-          <a:xfrm>
-            <a:off x="10268612" y="2179673"/>
-            <a:ext cx="143132" cy="239232"/>
-          </a:xfrm>
-          <a:prstGeom prst="rect">
-            <a:avLst/>
-          </a:prstGeom>
-          <a:solidFill>
-            <a:srgbClr val="F5E6A3"/>
+          <p:cNvPr id="83" name="Shape 81"/>
+          <p:cNvSpPr/>
+          <p:nvPr/>
+        </p:nvSpPr>
+        <p:spPr>
+          <a:xfrm>
+            <a:off x="10667180" y="2179673"/>
+            <a:ext cx="132122" cy="239232"/>
+          </a:xfrm>
+          <a:prstGeom prst="rect">
+            <a:avLst/>
+          </a:prstGeom>
+          <a:solidFill>
+            <a:srgbClr val="EAF8D8"/>
           </a:solidFill>
           <a:ln w="6350">
             <a:solidFill>
@@ -3660,20 +3510,20 @@
       </p:sp>
       <p:sp>
         <p:nvSpPr>
-          <p:cNvPr id="91" name="Shape 89"/>
-          <p:cNvSpPr/>
-          <p:nvPr/>
-        </p:nvSpPr>
-        <p:spPr>
-          <a:xfrm>
-            <a:off x="10411744" y="2179673"/>
-            <a:ext cx="143132" cy="239232"/>
-          </a:xfrm>
-          <a:prstGeom prst="rect">
-            <a:avLst/>
-          </a:prstGeom>
-          <a:solidFill>
-            <a:srgbClr val="F5E6A3"/>
+          <p:cNvPr id="84" name="Shape 82"/>
+          <p:cNvSpPr/>
+          <p:nvPr/>
+        </p:nvSpPr>
+        <p:spPr>
+          <a:xfrm>
+            <a:off x="10799303" y="2179673"/>
+            <a:ext cx="132122" cy="239232"/>
+          </a:xfrm>
+          <a:prstGeom prst="rect">
+            <a:avLst/>
+          </a:prstGeom>
+          <a:solidFill>
+            <a:srgbClr val="F2A7C3"/>
           </a:solidFill>
           <a:ln w="6350">
             <a:solidFill>
@@ -3685,20 +3535,20 @@
       </p:sp>
       <p:sp>
         <p:nvSpPr>
-          <p:cNvPr id="92" name="Shape 90"/>
-          <p:cNvSpPr/>
-          <p:nvPr/>
-        </p:nvSpPr>
-        <p:spPr>
-          <a:xfrm>
-            <a:off x="10554876" y="2179673"/>
-            <a:ext cx="143132" cy="239232"/>
-          </a:xfrm>
-          <a:prstGeom prst="rect">
-            <a:avLst/>
-          </a:prstGeom>
-          <a:solidFill>
-            <a:srgbClr val="F5E6A3"/>
+          <p:cNvPr id="85" name="Shape 83"/>
+          <p:cNvSpPr/>
+          <p:nvPr/>
+        </p:nvSpPr>
+        <p:spPr>
+          <a:xfrm>
+            <a:off x="10931425" y="2179673"/>
+            <a:ext cx="132122" cy="239232"/>
+          </a:xfrm>
+          <a:prstGeom prst="rect">
+            <a:avLst/>
+          </a:prstGeom>
+          <a:solidFill>
+            <a:srgbClr val="E9E7F4"/>
           </a:solidFill>
           <a:ln w="6350">
             <a:solidFill>
@@ -3710,20 +3560,20 @@
       </p:sp>
       <p:sp>
         <p:nvSpPr>
-          <p:cNvPr id="93" name="Shape 91"/>
-          <p:cNvSpPr/>
-          <p:nvPr/>
-        </p:nvSpPr>
-        <p:spPr>
-          <a:xfrm>
-            <a:off x="10698009" y="2179673"/>
-            <a:ext cx="143132" cy="239232"/>
-          </a:xfrm>
-          <a:prstGeom prst="rect">
-            <a:avLst/>
-          </a:prstGeom>
-          <a:solidFill>
-            <a:srgbClr val="F5E6A3"/>
+          <p:cNvPr id="86" name="Shape 84"/>
+          <p:cNvSpPr/>
+          <p:nvPr/>
+        </p:nvSpPr>
+        <p:spPr>
+          <a:xfrm>
+            <a:off x="11063547" y="2179673"/>
+            <a:ext cx="132122" cy="239232"/>
+          </a:xfrm>
+          <a:prstGeom prst="rect">
+            <a:avLst/>
+          </a:prstGeom>
+          <a:solidFill>
+            <a:srgbClr val="F2DEEC"/>
           </a:solidFill>
           <a:ln w="6350">
             <a:solidFill>
@@ -3735,20 +3585,20 @@
       </p:sp>
       <p:sp>
         <p:nvSpPr>
-          <p:cNvPr id="94" name="Shape 92"/>
-          <p:cNvSpPr/>
-          <p:nvPr/>
-        </p:nvSpPr>
-        <p:spPr>
-          <a:xfrm>
-            <a:off x="10841141" y="2179673"/>
-            <a:ext cx="143132" cy="239232"/>
-          </a:xfrm>
-          <a:prstGeom prst="rect">
-            <a:avLst/>
-          </a:prstGeom>
-          <a:solidFill>
-            <a:srgbClr val="F2A7C3"/>
+          <p:cNvPr id="87" name="Shape 85"/>
+          <p:cNvSpPr/>
+          <p:nvPr/>
+        </p:nvSpPr>
+        <p:spPr>
+          <a:xfrm>
+            <a:off x="11195669" y="2179673"/>
+            <a:ext cx="132122" cy="239232"/>
+          </a:xfrm>
+          <a:prstGeom prst="rect">
+            <a:avLst/>
+          </a:prstGeom>
+          <a:solidFill>
+            <a:srgbClr val="E6DDDB"/>
           </a:solidFill>
           <a:ln w="6350">
             <a:solidFill>
@@ -3760,14 +3610,14 @@
       </p:sp>
       <p:sp>
         <p:nvSpPr>
-          <p:cNvPr id="95" name="Text 93"/>
-          <p:cNvSpPr/>
-          <p:nvPr/>
-        </p:nvSpPr>
-        <p:spPr>
-          <a:xfrm>
-            <a:off x="10841141" y="2179673"/>
-            <a:ext cx="143132" cy="239232"/>
+          <p:cNvPr id="88" name="Text 86"/>
+          <p:cNvSpPr/>
+          <p:nvPr/>
+        </p:nvSpPr>
+        <p:spPr>
+          <a:xfrm>
+            <a:off x="10649464" y="2166973"/>
+            <a:ext cx="431800" cy="264632"/>
           </a:xfrm>
           <a:prstGeom prst="rect">
             <a:avLst/>
@@ -3776,14 +3626,14 @@
           <a:ln/>
         </p:spPr>
         <p:txBody>
-          <a:bodyPr wrap="square" lIns="0" tIns="0" rIns="0" bIns="0" rtlCol="0" anchor="ctr"/>
+          <a:bodyPr wrap="none" lIns="0" tIns="0" rIns="0" bIns="0" rtlCol="0" anchor="ctr"/>
           <a:lstStyle/>
           <a:p>
             <a:pPr algn="ctr" indent="0" marL="0">
               <a:buNone/>
             </a:pPr>
             <a:r>
-              <a:rPr lang="en-US" sz="1100" i="1" dirty="0">
+              <a:rPr lang="en-US" sz="900" i="1" dirty="0">
                 <a:solidFill>
                   <a:srgbClr val="C00000"/>
                 </a:solidFill>
@@ -3797,7 +3647,7 @@
               <a:buNone/>
             </a:pPr>
             <a:r>
-              <a:rPr lang="en-US" sz="750" i="1" baseline="-40000" dirty="0">
+              <a:rPr lang="en-US" sz="700" i="1" baseline="-40000" dirty="0">
                 <a:solidFill>
                   <a:srgbClr val="C00000"/>
                 </a:solidFill>
@@ -3807,20 +3657,20 @@
               </a:rPr>
               <a:t>N-1</a:t>
             </a:r>
-            <a:endParaRPr lang="en-US" sz="1100" dirty="0"/>
+            <a:endParaRPr lang="en-US" sz="900" dirty="0"/>
           </a:p>
         </p:txBody>
       </p:sp>
       <p:sp>
         <p:nvSpPr>
-          <p:cNvPr id="96" name="Shape 94"/>
-          <p:cNvSpPr/>
-          <p:nvPr/>
-        </p:nvSpPr>
-        <p:spPr>
-          <a:xfrm>
-            <a:off x="8070743" y="2252890"/>
-            <a:ext cx="119380" cy="119380"/>
+          <p:cNvPr id="89" name="Shape 87"/>
+          <p:cNvSpPr/>
+          <p:nvPr/>
+        </p:nvSpPr>
+        <p:spPr>
+          <a:xfrm>
+            <a:off x="8076458" y="2258605"/>
+            <a:ext cx="107950" cy="107950"/>
           </a:xfrm>
           <a:prstGeom prst="ellipse">
             <a:avLst/>
@@ -3838,14 +3688,14 @@
       </p:sp>
       <p:sp>
         <p:nvSpPr>
-          <p:cNvPr id="97" name="Shape 95"/>
-          <p:cNvSpPr/>
-          <p:nvPr/>
-        </p:nvSpPr>
-        <p:spPr>
-          <a:xfrm>
-            <a:off x="8308563" y="2252890"/>
-            <a:ext cx="119380" cy="119380"/>
+          <p:cNvPr id="90" name="Shape 88"/>
+          <p:cNvSpPr/>
+          <p:nvPr/>
+        </p:nvSpPr>
+        <p:spPr>
+          <a:xfrm>
+            <a:off x="8314278" y="2258605"/>
+            <a:ext cx="107950" cy="107950"/>
           </a:xfrm>
           <a:prstGeom prst="ellipse">
             <a:avLst/>
@@ -3863,14 +3713,14 @@
       </p:sp>
       <p:sp>
         <p:nvSpPr>
-          <p:cNvPr id="98" name="Shape 96"/>
-          <p:cNvSpPr/>
-          <p:nvPr/>
-        </p:nvSpPr>
-        <p:spPr>
-          <a:xfrm>
-            <a:off x="8552989" y="2252890"/>
-            <a:ext cx="119380" cy="119380"/>
+          <p:cNvPr id="91" name="Shape 89"/>
+          <p:cNvSpPr/>
+          <p:nvPr/>
+        </p:nvSpPr>
+        <p:spPr>
+          <a:xfrm>
+            <a:off x="8558704" y="2258605"/>
+            <a:ext cx="107950" cy="107950"/>
           </a:xfrm>
           <a:prstGeom prst="ellipse">
             <a:avLst/>
@@ -3888,14 +3738,14 @@
       </p:sp>
       <p:sp>
         <p:nvSpPr>
-          <p:cNvPr id="99" name="Shape 97"/>
-          <p:cNvSpPr/>
-          <p:nvPr/>
-        </p:nvSpPr>
-        <p:spPr>
-          <a:xfrm>
-            <a:off x="8790809" y="2252890"/>
-            <a:ext cx="119380" cy="119380"/>
+          <p:cNvPr id="92" name="Shape 90"/>
+          <p:cNvSpPr/>
+          <p:nvPr/>
+        </p:nvSpPr>
+        <p:spPr>
+          <a:xfrm>
+            <a:off x="8796524" y="2258605"/>
+            <a:ext cx="107950" cy="107950"/>
           </a:xfrm>
           <a:prstGeom prst="ellipse">
             <a:avLst/>
@@ -3913,14 +3763,14 @@
       </p:sp>
       <p:sp>
         <p:nvSpPr>
-          <p:cNvPr id="100" name="Shape 98"/>
-          <p:cNvSpPr/>
-          <p:nvPr/>
-        </p:nvSpPr>
-        <p:spPr>
-          <a:xfrm>
-            <a:off x="8988993" y="2252890"/>
-            <a:ext cx="119380" cy="119380"/>
+          <p:cNvPr id="93" name="Shape 91"/>
+          <p:cNvSpPr/>
+          <p:nvPr/>
+        </p:nvSpPr>
+        <p:spPr>
+          <a:xfrm>
+            <a:off x="8994708" y="2258605"/>
+            <a:ext cx="107950" cy="107950"/>
           </a:xfrm>
           <a:prstGeom prst="ellipse">
             <a:avLst/>
@@ -3938,7 +3788,7 @@
       </p:sp>
       <p:sp>
         <p:nvSpPr>
-          <p:cNvPr id="101" name="Shape 99"/>
+          <p:cNvPr id="94" name="Shape 92"/>
           <p:cNvSpPr/>
           <p:nvPr/>
         </p:nvSpPr>
@@ -3947,8 +3797,10 @@
             <a:off x="1920688" y="2884080"/>
             <a:ext cx="9499590" cy="518337"/>
           </a:xfrm>
-          <a:prstGeom prst="rect">
-            <a:avLst/>
+          <a:prstGeom prst="roundRect">
+            <a:avLst>
+              <a:gd name="adj" fmla="val 10585"/>
+            </a:avLst>
           </a:prstGeom>
           <a:solidFill>
             <a:srgbClr val="C9C7F6"/>
@@ -3957,13 +3809,13 @@
             <a:solidFill>
               <a:srgbClr val="3333CC"/>
             </a:solidFill>
-            <a:prstDash val="dash"/>
-          </a:ln>
-        </p:spPr>
-      </p:sp>
-      <p:sp>
-        <p:nvSpPr>
-          <p:cNvPr id="102" name="Shape 100"/>
+            <a:prstDash val="sysDash"/>
+          </a:ln>
+        </p:spPr>
+      </p:sp>
+      <p:sp>
+        <p:nvSpPr>
+          <p:cNvPr id="95" name="Shape 93"/>
           <p:cNvSpPr/>
           <p:nvPr/>
         </p:nvSpPr>
@@ -3985,7 +3837,7 @@
       </p:sp>
       <p:sp>
         <p:nvSpPr>
-          <p:cNvPr id="103" name="Text 101"/>
+          <p:cNvPr id="96" name="Text 94"/>
           <p:cNvSpPr/>
           <p:nvPr/>
         </p:nvSpPr>
@@ -4027,7 +3879,7 @@
       </p:sp>
       <p:sp>
         <p:nvSpPr>
-          <p:cNvPr id="104" name="Shape 102"/>
+          <p:cNvPr id="97" name="Shape 95"/>
           <p:cNvSpPr/>
           <p:nvPr/>
         </p:nvSpPr>
@@ -4049,7 +3901,7 @@
       </p:sp>
       <p:sp>
         <p:nvSpPr>
-          <p:cNvPr id="105" name="Text 103"/>
+          <p:cNvPr id="98" name="Text 96"/>
           <p:cNvSpPr/>
           <p:nvPr/>
         </p:nvSpPr>
@@ -4091,7 +3943,7 @@
       </p:sp>
       <p:sp>
         <p:nvSpPr>
-          <p:cNvPr id="106" name="Shape 104"/>
+          <p:cNvPr id="99" name="Shape 97"/>
           <p:cNvSpPr/>
           <p:nvPr/>
         </p:nvSpPr>
@@ -4113,7 +3965,7 @@
       </p:sp>
       <p:sp>
         <p:nvSpPr>
-          <p:cNvPr id="107" name="Text 105"/>
+          <p:cNvPr id="100" name="Text 98"/>
           <p:cNvSpPr/>
           <p:nvPr/>
         </p:nvSpPr>
@@ -4155,7 +4007,7 @@
       </p:sp>
       <p:sp>
         <p:nvSpPr>
-          <p:cNvPr id="108" name="Shape 106"/>
+          <p:cNvPr id="101" name="Shape 99"/>
           <p:cNvSpPr/>
           <p:nvPr/>
         </p:nvSpPr>
@@ -4177,7 +4029,7 @@
       </p:sp>
       <p:sp>
         <p:nvSpPr>
-          <p:cNvPr id="109" name="Text 107"/>
+          <p:cNvPr id="102" name="Text 100"/>
           <p:cNvSpPr/>
           <p:nvPr/>
         </p:nvSpPr>
@@ -4219,7 +4071,7 @@
       </p:sp>
       <p:sp>
         <p:nvSpPr>
-          <p:cNvPr id="110" name="Shape 108"/>
+          <p:cNvPr id="103" name="Shape 101"/>
           <p:cNvSpPr/>
           <p:nvPr/>
         </p:nvSpPr>
@@ -4241,7 +4093,7 @@
       </p:sp>
       <p:sp>
         <p:nvSpPr>
-          <p:cNvPr id="111" name="Text 109"/>
+          <p:cNvPr id="104" name="Text 102"/>
           <p:cNvSpPr/>
           <p:nvPr/>
         </p:nvSpPr>
@@ -4283,7 +4135,7 @@
       </p:sp>
       <p:sp>
         <p:nvSpPr>
-          <p:cNvPr id="112" name="Shape 110"/>
+          <p:cNvPr id="105" name="Shape 103"/>
           <p:cNvSpPr/>
           <p:nvPr/>
         </p:nvSpPr>
@@ -4305,7 +4157,7 @@
       </p:sp>
       <p:sp>
         <p:nvSpPr>
-          <p:cNvPr id="113" name="Text 111"/>
+          <p:cNvPr id="106" name="Text 104"/>
           <p:cNvSpPr/>
           <p:nvPr/>
         </p:nvSpPr>
@@ -4347,7 +4199,7 @@
       </p:sp>
       <p:sp>
         <p:nvSpPr>
-          <p:cNvPr id="114" name="Shape 112"/>
+          <p:cNvPr id="107" name="Shape 105"/>
           <p:cNvSpPr/>
           <p:nvPr/>
         </p:nvSpPr>
@@ -4369,7 +4221,7 @@
       </p:sp>
       <p:sp>
         <p:nvSpPr>
-          <p:cNvPr id="115" name="Text 113"/>
+          <p:cNvPr id="108" name="Text 106"/>
           <p:cNvSpPr/>
           <p:nvPr/>
         </p:nvSpPr>
@@ -4428,7 +4280,7 @@
       </p:sp>
       <p:sp>
         <p:nvSpPr>
-          <p:cNvPr id="116" name="Shape 114"/>
+          <p:cNvPr id="109" name="Shape 107"/>
           <p:cNvSpPr/>
           <p:nvPr/>
         </p:nvSpPr>
@@ -4450,7 +4302,7 @@
       </p:sp>
       <p:sp>
         <p:nvSpPr>
-          <p:cNvPr id="117" name="Text 115"/>
+          <p:cNvPr id="110" name="Text 108"/>
           <p:cNvSpPr/>
           <p:nvPr/>
         </p:nvSpPr>
@@ -4509,24 +4361,199 @@
       </p:sp>
       <p:sp>
         <p:nvSpPr>
+          <p:cNvPr id="111" name="Shape 109"/>
+          <p:cNvSpPr/>
+          <p:nvPr/>
+        </p:nvSpPr>
+        <p:spPr>
+          <a:xfrm>
+            <a:off x="8076458" y="3049401"/>
+            <a:ext cx="107950" cy="107950"/>
+          </a:xfrm>
+          <a:prstGeom prst="ellipse">
+            <a:avLst/>
+          </a:prstGeom>
+          <a:solidFill>
+            <a:srgbClr val="3333CC"/>
+          </a:solidFill>
+          <a:ln w="3175">
+            <a:solidFill>
+              <a:srgbClr val="3333CC"/>
+            </a:solidFill>
+            <a:prstDash val="solid"/>
+          </a:ln>
+        </p:spPr>
+      </p:sp>
+      <p:sp>
+        <p:nvSpPr>
+          <p:cNvPr id="112" name="Shape 110"/>
+          <p:cNvSpPr/>
+          <p:nvPr/>
+        </p:nvSpPr>
+        <p:spPr>
+          <a:xfrm>
+            <a:off x="8314278" y="3049401"/>
+            <a:ext cx="107950" cy="107950"/>
+          </a:xfrm>
+          <a:prstGeom prst="ellipse">
+            <a:avLst/>
+          </a:prstGeom>
+          <a:solidFill>
+            <a:srgbClr val="3333CC"/>
+          </a:solidFill>
+          <a:ln w="3175">
+            <a:solidFill>
+              <a:srgbClr val="3333CC"/>
+            </a:solidFill>
+            <a:prstDash val="solid"/>
+          </a:ln>
+        </p:spPr>
+      </p:sp>
+      <p:sp>
+        <p:nvSpPr>
+          <p:cNvPr id="113" name="Shape 111"/>
+          <p:cNvSpPr/>
+          <p:nvPr/>
+        </p:nvSpPr>
+        <p:spPr>
+          <a:xfrm>
+            <a:off x="8558704" y="3049401"/>
+            <a:ext cx="107950" cy="107950"/>
+          </a:xfrm>
+          <a:prstGeom prst="ellipse">
+            <a:avLst/>
+          </a:prstGeom>
+          <a:solidFill>
+            <a:srgbClr val="3333CC"/>
+          </a:solidFill>
+          <a:ln w="3175">
+            <a:solidFill>
+              <a:srgbClr val="3333CC"/>
+            </a:solidFill>
+            <a:prstDash val="solid"/>
+          </a:ln>
+        </p:spPr>
+      </p:sp>
+      <p:sp>
+        <p:nvSpPr>
+          <p:cNvPr id="114" name="Shape 112"/>
+          <p:cNvSpPr/>
+          <p:nvPr/>
+        </p:nvSpPr>
+        <p:spPr>
+          <a:xfrm>
+            <a:off x="8796524" y="3049401"/>
+            <a:ext cx="107950" cy="107950"/>
+          </a:xfrm>
+          <a:prstGeom prst="ellipse">
+            <a:avLst/>
+          </a:prstGeom>
+          <a:solidFill>
+            <a:srgbClr val="3333CC"/>
+          </a:solidFill>
+          <a:ln w="3175">
+            <a:solidFill>
+              <a:srgbClr val="3333CC"/>
+            </a:solidFill>
+            <a:prstDash val="solid"/>
+          </a:ln>
+        </p:spPr>
+      </p:sp>
+      <p:sp>
+        <p:nvSpPr>
+          <p:cNvPr id="115" name="Shape 113"/>
+          <p:cNvSpPr/>
+          <p:nvPr/>
+        </p:nvSpPr>
+        <p:spPr>
+          <a:xfrm>
+            <a:off x="8994708" y="3049401"/>
+            <a:ext cx="107950" cy="107950"/>
+          </a:xfrm>
+          <a:prstGeom prst="ellipse">
+            <a:avLst/>
+          </a:prstGeom>
+          <a:solidFill>
+            <a:srgbClr val="3333CC"/>
+          </a:solidFill>
+          <a:ln w="3175">
+            <a:solidFill>
+              <a:srgbClr val="3333CC"/>
+            </a:solidFill>
+            <a:prstDash val="solid"/>
+          </a:ln>
+        </p:spPr>
+      </p:sp>
+      <p:sp>
+        <p:nvSpPr>
+          <p:cNvPr id="116" name="Shape 114"/>
+          <p:cNvSpPr/>
+          <p:nvPr/>
+        </p:nvSpPr>
+        <p:spPr>
+          <a:xfrm flipV="1">
+            <a:off x="3333013" y="3314625"/>
+            <a:ext cx="95250" cy="82550"/>
+          </a:xfrm>
+          <a:prstGeom prst="triangle">
+            <a:avLst/>
+          </a:prstGeom>
+          <a:solidFill>
+            <a:srgbClr val="FFA500"/>
+          </a:solidFill>
+          <a:ln w="12700">
+            <a:solidFill>
+              <a:srgbClr val="FFA500"/>
+            </a:solidFill>
+            <a:prstDash val="solid"/>
+          </a:ln>
+        </p:spPr>
+      </p:sp>
+      <p:sp>
+        <p:nvSpPr>
+          <p:cNvPr id="117" name="Shape 115"/>
+          <p:cNvSpPr/>
+          <p:nvPr/>
+        </p:nvSpPr>
+        <p:spPr>
+          <a:xfrm flipV="1">
+            <a:off x="4304112" y="3314625"/>
+            <a:ext cx="95250" cy="82550"/>
+          </a:xfrm>
+          <a:prstGeom prst="triangle">
+            <a:avLst/>
+          </a:prstGeom>
+          <a:solidFill>
+            <a:srgbClr val="FFA500"/>
+          </a:solidFill>
+          <a:ln w="12700">
+            <a:solidFill>
+              <a:srgbClr val="FFA500"/>
+            </a:solidFill>
+            <a:prstDash val="solid"/>
+          </a:ln>
+        </p:spPr>
+      </p:sp>
+      <p:sp>
+        <p:nvSpPr>
           <p:cNvPr id="118" name="Shape 116"/>
           <p:cNvSpPr/>
           <p:nvPr/>
         </p:nvSpPr>
         <p:spPr>
-          <a:xfrm>
-            <a:off x="8070743" y="3043686"/>
-            <a:ext cx="119380" cy="119380"/>
-          </a:xfrm>
-          <a:prstGeom prst="ellipse">
-            <a:avLst/>
-          </a:prstGeom>
-          <a:solidFill>
-            <a:srgbClr val="3333CC"/>
-          </a:solidFill>
-          <a:ln w="3175">
-            <a:solidFill>
-              <a:srgbClr val="3333CC"/>
+          <a:xfrm flipV="1">
+            <a:off x="5281817" y="3314625"/>
+            <a:ext cx="95250" cy="82550"/>
+          </a:xfrm>
+          <a:prstGeom prst="triangle">
+            <a:avLst/>
+          </a:prstGeom>
+          <a:solidFill>
+            <a:srgbClr val="FFA500"/>
+          </a:solidFill>
+          <a:ln w="12700">
+            <a:solidFill>
+              <a:srgbClr val="FFA500"/>
             </a:solidFill>
             <a:prstDash val="solid"/>
           </a:ln>
@@ -4539,19 +4566,19 @@
           <p:nvPr/>
         </p:nvSpPr>
         <p:spPr>
-          <a:xfrm>
-            <a:off x="8308563" y="3043686"/>
-            <a:ext cx="119380" cy="119380"/>
-          </a:xfrm>
-          <a:prstGeom prst="ellipse">
-            <a:avLst/>
-          </a:prstGeom>
-          <a:solidFill>
-            <a:srgbClr val="3333CC"/>
-          </a:solidFill>
-          <a:ln w="3175">
-            <a:solidFill>
-              <a:srgbClr val="3333CC"/>
+          <a:xfrm flipV="1">
+            <a:off x="6252915" y="3314625"/>
+            <a:ext cx="95250" cy="82550"/>
+          </a:xfrm>
+          <a:prstGeom prst="triangle">
+            <a:avLst/>
+          </a:prstGeom>
+          <a:solidFill>
+            <a:srgbClr val="FFA500"/>
+          </a:solidFill>
+          <a:ln w="12700">
+            <a:solidFill>
+              <a:srgbClr val="FFA500"/>
             </a:solidFill>
             <a:prstDash val="solid"/>
           </a:ln>
@@ -4564,19 +4591,19 @@
           <p:nvPr/>
         </p:nvSpPr>
         <p:spPr>
-          <a:xfrm>
-            <a:off x="8552989" y="3043686"/>
-            <a:ext cx="119380" cy="119380"/>
-          </a:xfrm>
-          <a:prstGeom prst="ellipse">
-            <a:avLst/>
-          </a:prstGeom>
-          <a:solidFill>
-            <a:srgbClr val="3333CC"/>
-          </a:solidFill>
-          <a:ln w="3175">
-            <a:solidFill>
-              <a:srgbClr val="3333CC"/>
+          <a:xfrm flipV="1">
+            <a:off x="7224014" y="3314625"/>
+            <a:ext cx="95250" cy="82550"/>
+          </a:xfrm>
+          <a:prstGeom prst="triangle">
+            <a:avLst/>
+          </a:prstGeom>
+          <a:solidFill>
+            <a:srgbClr val="FFA500"/>
+          </a:solidFill>
+          <a:ln w="12700">
+            <a:solidFill>
+              <a:srgbClr val="FFA500"/>
             </a:solidFill>
             <a:prstDash val="solid"/>
           </a:ln>
@@ -4589,61 +4616,11 @@
           <p:nvPr/>
         </p:nvSpPr>
         <p:spPr>
-          <a:xfrm>
-            <a:off x="8790809" y="3043686"/>
-            <a:ext cx="119380" cy="119380"/>
-          </a:xfrm>
-          <a:prstGeom prst="ellipse">
-            <a:avLst/>
-          </a:prstGeom>
-          <a:solidFill>
-            <a:srgbClr val="3333CC"/>
-          </a:solidFill>
-          <a:ln w="3175">
-            <a:solidFill>
-              <a:srgbClr val="3333CC"/>
-            </a:solidFill>
-            <a:prstDash val="solid"/>
-          </a:ln>
-        </p:spPr>
-      </p:sp>
-      <p:sp>
-        <p:nvSpPr>
-          <p:cNvPr id="122" name="Shape 120"/>
-          <p:cNvSpPr/>
-          <p:nvPr/>
-        </p:nvSpPr>
-        <p:spPr>
-          <a:xfrm>
-            <a:off x="8988993" y="3043686"/>
-            <a:ext cx="119380" cy="119380"/>
-          </a:xfrm>
-          <a:prstGeom prst="ellipse">
-            <a:avLst/>
-          </a:prstGeom>
-          <a:solidFill>
-            <a:srgbClr val="3333CC"/>
-          </a:solidFill>
-          <a:ln w="3175">
-            <a:solidFill>
-              <a:srgbClr val="3333CC"/>
-            </a:solidFill>
-            <a:prstDash val="solid"/>
-          </a:ln>
-        </p:spPr>
-      </p:sp>
-      <p:sp>
-        <p:nvSpPr>
-          <p:cNvPr id="123" name="Shape 121"/>
-          <p:cNvSpPr/>
-          <p:nvPr/>
-        </p:nvSpPr>
-        <p:spPr>
-          <a:xfrm rot="1080000">
-            <a:off x="3339363" y="3302220"/>
-            <a:ext cx="41275" cy="120650"/>
-          </a:xfrm>
-          <a:prstGeom prst="rect">
+          <a:xfrm flipV="1">
+            <a:off x="10731859" y="3314625"/>
+            <a:ext cx="95250" cy="82550"/>
+          </a:xfrm>
+          <a:prstGeom prst="triangle">
             <a:avLst/>
           </a:prstGeom>
           <a:solidFill>
@@ -4659,282 +4636,7 @@
       </p:sp>
       <p:sp>
         <p:nvSpPr>
-          <p:cNvPr id="124" name="Shape 122"/>
-          <p:cNvSpPr/>
-          <p:nvPr/>
-        </p:nvSpPr>
-        <p:spPr>
-          <a:xfrm rot="-1080000">
-            <a:off x="3380638" y="3302220"/>
-            <a:ext cx="41275" cy="120650"/>
-          </a:xfrm>
-          <a:prstGeom prst="rect">
-            <a:avLst/>
-          </a:prstGeom>
-          <a:solidFill>
-            <a:srgbClr val="FFA500"/>
-          </a:solidFill>
-          <a:ln w="12700">
-            <a:solidFill>
-              <a:srgbClr val="FFA500"/>
-            </a:solidFill>
-            <a:prstDash val="solid"/>
-          </a:ln>
-        </p:spPr>
-      </p:sp>
-      <p:sp>
-        <p:nvSpPr>
-          <p:cNvPr id="125" name="Shape 123"/>
-          <p:cNvSpPr/>
-          <p:nvPr/>
-        </p:nvSpPr>
-        <p:spPr>
-          <a:xfrm rot="1080000">
-            <a:off x="4310462" y="3302220"/>
-            <a:ext cx="41275" cy="120650"/>
-          </a:xfrm>
-          <a:prstGeom prst="rect">
-            <a:avLst/>
-          </a:prstGeom>
-          <a:solidFill>
-            <a:srgbClr val="FFA500"/>
-          </a:solidFill>
-          <a:ln w="12700">
-            <a:solidFill>
-              <a:srgbClr val="FFA500"/>
-            </a:solidFill>
-            <a:prstDash val="solid"/>
-          </a:ln>
-        </p:spPr>
-      </p:sp>
-      <p:sp>
-        <p:nvSpPr>
-          <p:cNvPr id="126" name="Shape 124"/>
-          <p:cNvSpPr/>
-          <p:nvPr/>
-        </p:nvSpPr>
-        <p:spPr>
-          <a:xfrm rot="-1080000">
-            <a:off x="4351737" y="3302220"/>
-            <a:ext cx="41275" cy="120650"/>
-          </a:xfrm>
-          <a:prstGeom prst="rect">
-            <a:avLst/>
-          </a:prstGeom>
-          <a:solidFill>
-            <a:srgbClr val="FFA500"/>
-          </a:solidFill>
-          <a:ln w="12700">
-            <a:solidFill>
-              <a:srgbClr val="FFA500"/>
-            </a:solidFill>
-            <a:prstDash val="solid"/>
-          </a:ln>
-        </p:spPr>
-      </p:sp>
-      <p:sp>
-        <p:nvSpPr>
-          <p:cNvPr id="127" name="Shape 125"/>
-          <p:cNvSpPr/>
-          <p:nvPr/>
-        </p:nvSpPr>
-        <p:spPr>
-          <a:xfrm rot="1080000">
-            <a:off x="5288167" y="3302220"/>
-            <a:ext cx="41275" cy="120650"/>
-          </a:xfrm>
-          <a:prstGeom prst="rect">
-            <a:avLst/>
-          </a:prstGeom>
-          <a:solidFill>
-            <a:srgbClr val="FFA500"/>
-          </a:solidFill>
-          <a:ln w="12700">
-            <a:solidFill>
-              <a:srgbClr val="FFA500"/>
-            </a:solidFill>
-            <a:prstDash val="solid"/>
-          </a:ln>
-        </p:spPr>
-      </p:sp>
-      <p:sp>
-        <p:nvSpPr>
-          <p:cNvPr id="128" name="Shape 126"/>
-          <p:cNvSpPr/>
-          <p:nvPr/>
-        </p:nvSpPr>
-        <p:spPr>
-          <a:xfrm rot="-1080000">
-            <a:off x="5329442" y="3302220"/>
-            <a:ext cx="41275" cy="120650"/>
-          </a:xfrm>
-          <a:prstGeom prst="rect">
-            <a:avLst/>
-          </a:prstGeom>
-          <a:solidFill>
-            <a:srgbClr val="FFA500"/>
-          </a:solidFill>
-          <a:ln w="12700">
-            <a:solidFill>
-              <a:srgbClr val="FFA500"/>
-            </a:solidFill>
-            <a:prstDash val="solid"/>
-          </a:ln>
-        </p:spPr>
-      </p:sp>
-      <p:sp>
-        <p:nvSpPr>
-          <p:cNvPr id="129" name="Shape 127"/>
-          <p:cNvSpPr/>
-          <p:nvPr/>
-        </p:nvSpPr>
-        <p:spPr>
-          <a:xfrm rot="1080000">
-            <a:off x="6259265" y="3302220"/>
-            <a:ext cx="41275" cy="120650"/>
-          </a:xfrm>
-          <a:prstGeom prst="rect">
-            <a:avLst/>
-          </a:prstGeom>
-          <a:solidFill>
-            <a:srgbClr val="FFA500"/>
-          </a:solidFill>
-          <a:ln w="12700">
-            <a:solidFill>
-              <a:srgbClr val="FFA500"/>
-            </a:solidFill>
-            <a:prstDash val="solid"/>
-          </a:ln>
-        </p:spPr>
-      </p:sp>
-      <p:sp>
-        <p:nvSpPr>
-          <p:cNvPr id="130" name="Shape 128"/>
-          <p:cNvSpPr/>
-          <p:nvPr/>
-        </p:nvSpPr>
-        <p:spPr>
-          <a:xfrm rot="-1080000">
-            <a:off x="6300540" y="3302220"/>
-            <a:ext cx="41275" cy="120650"/>
-          </a:xfrm>
-          <a:prstGeom prst="rect">
-            <a:avLst/>
-          </a:prstGeom>
-          <a:solidFill>
-            <a:srgbClr val="FFA500"/>
-          </a:solidFill>
-          <a:ln w="12700">
-            <a:solidFill>
-              <a:srgbClr val="FFA500"/>
-            </a:solidFill>
-            <a:prstDash val="solid"/>
-          </a:ln>
-        </p:spPr>
-      </p:sp>
-      <p:sp>
-        <p:nvSpPr>
-          <p:cNvPr id="131" name="Shape 129"/>
-          <p:cNvSpPr/>
-          <p:nvPr/>
-        </p:nvSpPr>
-        <p:spPr>
-          <a:xfrm rot="1080000">
-            <a:off x="7230364" y="3302220"/>
-            <a:ext cx="41275" cy="120650"/>
-          </a:xfrm>
-          <a:prstGeom prst="rect">
-            <a:avLst/>
-          </a:prstGeom>
-          <a:solidFill>
-            <a:srgbClr val="FFA500"/>
-          </a:solidFill>
-          <a:ln w="12700">
-            <a:solidFill>
-              <a:srgbClr val="FFA500"/>
-            </a:solidFill>
-            <a:prstDash val="solid"/>
-          </a:ln>
-        </p:spPr>
-      </p:sp>
-      <p:sp>
-        <p:nvSpPr>
-          <p:cNvPr id="132" name="Shape 130"/>
-          <p:cNvSpPr/>
-          <p:nvPr/>
-        </p:nvSpPr>
-        <p:spPr>
-          <a:xfrm rot="-1080000">
-            <a:off x="7271639" y="3302220"/>
-            <a:ext cx="41275" cy="120650"/>
-          </a:xfrm>
-          <a:prstGeom prst="rect">
-            <a:avLst/>
-          </a:prstGeom>
-          <a:solidFill>
-            <a:srgbClr val="FFA500"/>
-          </a:solidFill>
-          <a:ln w="12700">
-            <a:solidFill>
-              <a:srgbClr val="FFA500"/>
-            </a:solidFill>
-            <a:prstDash val="solid"/>
-          </a:ln>
-        </p:spPr>
-      </p:sp>
-      <p:sp>
-        <p:nvSpPr>
-          <p:cNvPr id="133" name="Shape 131"/>
-          <p:cNvSpPr/>
-          <p:nvPr/>
-        </p:nvSpPr>
-        <p:spPr>
-          <a:xfrm rot="1080000">
-            <a:off x="10738209" y="3302220"/>
-            <a:ext cx="41275" cy="120650"/>
-          </a:xfrm>
-          <a:prstGeom prst="rect">
-            <a:avLst/>
-          </a:prstGeom>
-          <a:solidFill>
-            <a:srgbClr val="FFA500"/>
-          </a:solidFill>
-          <a:ln w="12700">
-            <a:solidFill>
-              <a:srgbClr val="FFA500"/>
-            </a:solidFill>
-            <a:prstDash val="solid"/>
-          </a:ln>
-        </p:spPr>
-      </p:sp>
-      <p:sp>
-        <p:nvSpPr>
-          <p:cNvPr id="134" name="Shape 132"/>
-          <p:cNvSpPr/>
-          <p:nvPr/>
-        </p:nvSpPr>
-        <p:spPr>
-          <a:xfrm rot="-1080000">
-            <a:off x="10779484" y="3302220"/>
-            <a:ext cx="41275" cy="120650"/>
-          </a:xfrm>
-          <a:prstGeom prst="rect">
-            <a:avLst/>
-          </a:prstGeom>
-          <a:solidFill>
-            <a:srgbClr val="FFA500"/>
-          </a:solidFill>
-          <a:ln w="12700">
-            <a:solidFill>
-              <a:srgbClr val="FFA500"/>
-            </a:solidFill>
-            <a:prstDash val="solid"/>
-          </a:ln>
-        </p:spPr>
-      </p:sp>
-      <p:sp>
-        <p:nvSpPr>
-          <p:cNvPr id="135" name="Text 133"/>
+          <p:cNvPr id="122" name="Text 120"/>
           <p:cNvSpPr/>
           <p:nvPr/>
         </p:nvSpPr>
@@ -4987,7 +4689,7 @@
       </p:sp>
       <p:sp>
         <p:nvSpPr>
-          <p:cNvPr id="136" name="Text 134"/>
+          <p:cNvPr id="123" name="Text 121"/>
           <p:cNvSpPr/>
           <p:nvPr/>
         </p:nvSpPr>
@@ -5040,7 +4742,7 @@
       </p:sp>
       <p:sp>
         <p:nvSpPr>
-          <p:cNvPr id="137" name="Text 135"/>
+          <p:cNvPr id="124" name="Text 122"/>
           <p:cNvSpPr/>
           <p:nvPr/>
         </p:nvSpPr>
@@ -5093,7 +4795,7 @@
       </p:sp>
       <p:sp>
         <p:nvSpPr>
-          <p:cNvPr id="138" name="Text 136"/>
+          <p:cNvPr id="125" name="Text 123"/>
           <p:cNvSpPr/>
           <p:nvPr/>
         </p:nvSpPr>
@@ -5146,7 +4848,7 @@
       </p:sp>
       <p:sp>
         <p:nvSpPr>
-          <p:cNvPr id="139" name="Text 137"/>
+          <p:cNvPr id="126" name="Text 124"/>
           <p:cNvSpPr/>
           <p:nvPr/>
         </p:nvSpPr>
@@ -5199,7 +4901,7 @@
       </p:sp>
       <p:sp>
         <p:nvSpPr>
-          <p:cNvPr id="140" name="Text 138"/>
+          <p:cNvPr id="127" name="Text 125"/>
           <p:cNvSpPr/>
           <p:nvPr/>
         </p:nvSpPr>
@@ -5252,7 +4954,7 @@
       </p:sp>
       <p:sp>
         <p:nvSpPr>
-          <p:cNvPr id="141" name="Shape 139"/>
+          <p:cNvPr id="128" name="Shape 126"/>
           <p:cNvSpPr/>
           <p:nvPr/>
         </p:nvSpPr>
@@ -5277,7 +4979,7 @@
       </p:sp>
       <p:sp>
         <p:nvSpPr>
-          <p:cNvPr id="142" name="Text 140"/>
+          <p:cNvPr id="129" name="Text 127"/>
           <p:cNvSpPr/>
           <p:nvPr/>
         </p:nvSpPr>
@@ -5330,14 +5032,14 @@
       </p:sp>
       <p:sp>
         <p:nvSpPr>
-          <p:cNvPr id="143" name="Shape 141"/>
+          <p:cNvPr id="130" name="Shape 128"/>
           <p:cNvSpPr/>
           <p:nvPr/>
         </p:nvSpPr>
         <p:spPr>
           <a:xfrm>
             <a:off x="7820090" y="3508743"/>
-            <a:ext cx="105410" cy="372139"/>
+            <a:ext cx="105410" cy="289589"/>
           </a:xfrm>
           <a:prstGeom prst="rect">
             <a:avLst/>
@@ -5355,14 +5057,39 @@
       </p:sp>
       <p:sp>
         <p:nvSpPr>
-          <p:cNvPr id="144" name="Shape 142"/>
+          <p:cNvPr id="131" name="Shape 129"/>
+          <p:cNvSpPr/>
+          <p:nvPr/>
+        </p:nvSpPr>
+        <p:spPr>
+          <a:xfrm flipV="1">
+            <a:off x="7790245" y="3798332"/>
+            <a:ext cx="165100" cy="82550"/>
+          </a:xfrm>
+          <a:prstGeom prst="triangle">
+            <a:avLst/>
+          </a:prstGeom>
+          <a:solidFill>
+            <a:srgbClr val="C00000"/>
+          </a:solidFill>
+          <a:ln w="12700">
+            <a:solidFill>
+              <a:srgbClr val="C00000"/>
+            </a:solidFill>
+            <a:prstDash val="solid"/>
+          </a:ln>
+        </p:spPr>
+      </p:sp>
+      <p:sp>
+        <p:nvSpPr>
+          <p:cNvPr id="132" name="Shape 130"/>
           <p:cNvSpPr/>
           <p:nvPr/>
         </p:nvSpPr>
         <p:spPr>
           <a:xfrm>
             <a:off x="9213979" y="2604976"/>
-            <a:ext cx="105410" cy="1302488"/>
+            <a:ext cx="105410" cy="1219938"/>
           </a:xfrm>
           <a:prstGeom prst="rect">
             <a:avLst/>
@@ -5380,14 +5107,39 @@
       </p:sp>
       <p:sp>
         <p:nvSpPr>
-          <p:cNvPr id="145" name="Shape 143"/>
+          <p:cNvPr id="133" name="Shape 131"/>
+          <p:cNvSpPr/>
+          <p:nvPr/>
+        </p:nvSpPr>
+        <p:spPr>
+          <a:xfrm flipV="1">
+            <a:off x="9184134" y="3824913"/>
+            <a:ext cx="165100" cy="82550"/>
+          </a:xfrm>
+          <a:prstGeom prst="triangle">
+            <a:avLst/>
+          </a:prstGeom>
+          <a:solidFill>
+            <a:srgbClr val="C00000"/>
+          </a:solidFill>
+          <a:ln w="12700">
+            <a:solidFill>
+              <a:srgbClr val="C00000"/>
+            </a:solidFill>
+            <a:prstDash val="solid"/>
+          </a:ln>
+        </p:spPr>
+      </p:sp>
+      <p:sp>
+        <p:nvSpPr>
+          <p:cNvPr id="134" name="Shape 132"/>
           <p:cNvSpPr/>
           <p:nvPr/>
         </p:nvSpPr>
         <p:spPr>
           <a:xfrm>
             <a:off x="6564928" y="4399219"/>
-            <a:ext cx="105410" cy="385430"/>
+            <a:ext cx="105410" cy="302880"/>
           </a:xfrm>
           <a:prstGeom prst="rect">
             <a:avLst/>
@@ -5405,14 +5157,39 @@
       </p:sp>
       <p:sp>
         <p:nvSpPr>
-          <p:cNvPr id="146" name="Shape 144"/>
+          <p:cNvPr id="135" name="Shape 133"/>
+          <p:cNvSpPr/>
+          <p:nvPr/>
+        </p:nvSpPr>
+        <p:spPr>
+          <a:xfrm flipV="1">
+            <a:off x="6535083" y="4702099"/>
+            <a:ext cx="165100" cy="82550"/>
+          </a:xfrm>
+          <a:prstGeom prst="triangle">
+            <a:avLst/>
+          </a:prstGeom>
+          <a:solidFill>
+            <a:srgbClr val="C00000"/>
+          </a:solidFill>
+          <a:ln w="12700">
+            <a:solidFill>
+              <a:srgbClr val="C00000"/>
+            </a:solidFill>
+            <a:prstDash val="solid"/>
+          </a:ln>
+        </p:spPr>
+      </p:sp>
+      <p:sp>
+        <p:nvSpPr>
+          <p:cNvPr id="136" name="Shape 134"/>
           <p:cNvSpPr/>
           <p:nvPr/>
         </p:nvSpPr>
         <p:spPr>
           <a:xfrm>
             <a:off x="6564928" y="5568800"/>
-            <a:ext cx="105410" cy="358849"/>
+            <a:ext cx="105410" cy="276299"/>
           </a:xfrm>
           <a:prstGeom prst="rect">
             <a:avLst/>
@@ -5430,7 +5207,32 @@
       </p:sp>
       <p:sp>
         <p:nvSpPr>
-          <p:cNvPr id="147" name="Shape 145"/>
+          <p:cNvPr id="137" name="Shape 135"/>
+          <p:cNvSpPr/>
+          <p:nvPr/>
+        </p:nvSpPr>
+        <p:spPr>
+          <a:xfrm flipV="1">
+            <a:off x="6535083" y="5845098"/>
+            <a:ext cx="165100" cy="82550"/>
+          </a:xfrm>
+          <a:prstGeom prst="triangle">
+            <a:avLst/>
+          </a:prstGeom>
+          <a:solidFill>
+            <a:srgbClr val="C00000"/>
+          </a:solidFill>
+          <a:ln w="12700">
+            <a:solidFill>
+              <a:srgbClr val="C00000"/>
+            </a:solidFill>
+            <a:prstDash val="solid"/>
+          </a:ln>
+        </p:spPr>
+      </p:sp>
+      <p:sp>
+        <p:nvSpPr>
+          <p:cNvPr id="138" name="Shape 136"/>
           <p:cNvSpPr/>
           <p:nvPr/>
         </p:nvSpPr>
@@ -5439,8 +5241,10 @@
             <a:off x="1894263" y="4758068"/>
             <a:ext cx="9526014" cy="531628"/>
           </a:xfrm>
-          <a:prstGeom prst="rect">
-            <a:avLst/>
+          <a:prstGeom prst="roundRect">
+            <a:avLst>
+              <a:gd name="adj" fmla="val 10320"/>
+            </a:avLst>
           </a:prstGeom>
           <a:solidFill>
             <a:srgbClr val="FFFFFF"/>
@@ -5449,13 +5253,13 @@
             <a:solidFill>
               <a:srgbClr val="C00000"/>
             </a:solidFill>
-            <a:prstDash val="dash"/>
-          </a:ln>
-        </p:spPr>
-      </p:sp>
-      <p:sp>
-        <p:nvSpPr>
-          <p:cNvPr id="148" name="Shape 146"/>
+            <a:prstDash val="sysDash"/>
+          </a:ln>
+        </p:spPr>
+      </p:sp>
+      <p:sp>
+        <p:nvSpPr>
+          <p:cNvPr id="139" name="Shape 137"/>
           <p:cNvSpPr/>
           <p:nvPr/>
         </p:nvSpPr>
@@ -5467,6 +5271,9 @@
           <a:prstGeom prst="rect">
             <a:avLst/>
           </a:prstGeom>
+          <a:solidFill>
+            <a:srgbClr val="FAEEEE"/>
+          </a:solidFill>
           <a:ln w="12700">
             <a:solidFill>
               <a:srgbClr val="C00000"/>
@@ -5477,7 +5284,7 @@
       </p:sp>
       <p:sp>
         <p:nvSpPr>
-          <p:cNvPr id="149" name="Text 147"/>
+          <p:cNvPr id="140" name="Text 138"/>
           <p:cNvSpPr/>
           <p:nvPr/>
         </p:nvSpPr>
@@ -5519,7 +5326,7 @@
       </p:sp>
       <p:sp>
         <p:nvSpPr>
-          <p:cNvPr id="150" name="Shape 148"/>
+          <p:cNvPr id="141" name="Shape 139"/>
           <p:cNvSpPr/>
           <p:nvPr/>
         </p:nvSpPr>
@@ -5531,6 +5338,9 @@
           <a:prstGeom prst="rect">
             <a:avLst/>
           </a:prstGeom>
+          <a:solidFill>
+            <a:srgbClr val="FAEEEE"/>
+          </a:solidFill>
           <a:ln w="12700">
             <a:solidFill>
               <a:srgbClr val="C00000"/>
@@ -5541,7 +5351,7 @@
       </p:sp>
       <p:sp>
         <p:nvSpPr>
-          <p:cNvPr id="151" name="Text 149"/>
+          <p:cNvPr id="142" name="Text 140"/>
           <p:cNvSpPr/>
           <p:nvPr/>
         </p:nvSpPr>
@@ -5583,7 +5393,7 @@
       </p:sp>
       <p:sp>
         <p:nvSpPr>
-          <p:cNvPr id="152" name="Shape 150"/>
+          <p:cNvPr id="143" name="Shape 141"/>
           <p:cNvSpPr/>
           <p:nvPr/>
         </p:nvSpPr>
@@ -5595,6 +5405,9 @@
           <a:prstGeom prst="rect">
             <a:avLst/>
           </a:prstGeom>
+          <a:solidFill>
+            <a:srgbClr val="FAEEEE"/>
+          </a:solidFill>
           <a:ln w="12700">
             <a:solidFill>
               <a:srgbClr val="C00000"/>
@@ -5605,7 +5418,7 @@
       </p:sp>
       <p:sp>
         <p:nvSpPr>
-          <p:cNvPr id="153" name="Text 151"/>
+          <p:cNvPr id="144" name="Text 142"/>
           <p:cNvSpPr/>
           <p:nvPr/>
         </p:nvSpPr>
@@ -5647,7 +5460,7 @@
       </p:sp>
       <p:sp>
         <p:nvSpPr>
-          <p:cNvPr id="154" name="Shape 152"/>
+          <p:cNvPr id="145" name="Shape 143"/>
           <p:cNvSpPr/>
           <p:nvPr/>
         </p:nvSpPr>
@@ -5659,6 +5472,9 @@
           <a:prstGeom prst="rect">
             <a:avLst/>
           </a:prstGeom>
+          <a:solidFill>
+            <a:srgbClr val="FAEEEE"/>
+          </a:solidFill>
           <a:ln w="12700">
             <a:solidFill>
               <a:srgbClr val="C00000"/>
@@ -5669,7 +5485,7 @@
       </p:sp>
       <p:sp>
         <p:nvSpPr>
-          <p:cNvPr id="155" name="Text 153"/>
+          <p:cNvPr id="146" name="Text 144"/>
           <p:cNvSpPr/>
           <p:nvPr/>
         </p:nvSpPr>
@@ -5711,7 +5527,7 @@
       </p:sp>
       <p:sp>
         <p:nvSpPr>
-          <p:cNvPr id="156" name="Shape 154"/>
+          <p:cNvPr id="147" name="Shape 145"/>
           <p:cNvSpPr/>
           <p:nvPr/>
         </p:nvSpPr>
@@ -5723,6 +5539,9 @@
           <a:prstGeom prst="rect">
             <a:avLst/>
           </a:prstGeom>
+          <a:solidFill>
+            <a:srgbClr val="FAEEEE"/>
+          </a:solidFill>
           <a:ln w="12700">
             <a:solidFill>
               <a:srgbClr val="C00000"/>
@@ -5733,7 +5552,7 @@
       </p:sp>
       <p:sp>
         <p:nvSpPr>
-          <p:cNvPr id="157" name="Text 155"/>
+          <p:cNvPr id="148" name="Text 146"/>
           <p:cNvSpPr/>
           <p:nvPr/>
         </p:nvSpPr>
@@ -5775,7 +5594,7 @@
       </p:sp>
       <p:sp>
         <p:nvSpPr>
-          <p:cNvPr id="158" name="Shape 156"/>
+          <p:cNvPr id="149" name="Shape 147"/>
           <p:cNvSpPr/>
           <p:nvPr/>
         </p:nvSpPr>
@@ -5787,6 +5606,9 @@
           <a:prstGeom prst="rect">
             <a:avLst/>
           </a:prstGeom>
+          <a:solidFill>
+            <a:srgbClr val="FAEEEE"/>
+          </a:solidFill>
           <a:ln w="12700">
             <a:solidFill>
               <a:srgbClr val="C00000"/>
@@ -5797,7 +5619,7 @@
       </p:sp>
       <p:sp>
         <p:nvSpPr>
-          <p:cNvPr id="159" name="Text 157"/>
+          <p:cNvPr id="150" name="Text 148"/>
           <p:cNvSpPr/>
           <p:nvPr/>
         </p:nvSpPr>
@@ -5839,7 +5661,7 @@
       </p:sp>
       <p:sp>
         <p:nvSpPr>
-          <p:cNvPr id="160" name="Shape 158"/>
+          <p:cNvPr id="151" name="Shape 149"/>
           <p:cNvSpPr/>
           <p:nvPr/>
         </p:nvSpPr>
@@ -5851,6 +5673,9 @@
           <a:prstGeom prst="rect">
             <a:avLst/>
           </a:prstGeom>
+          <a:solidFill>
+            <a:srgbClr val="FAEEEE"/>
+          </a:solidFill>
           <a:ln w="12700">
             <a:solidFill>
               <a:srgbClr val="C00000"/>
@@ -5861,7 +5686,7 @@
       </p:sp>
       <p:sp>
         <p:nvSpPr>
-          <p:cNvPr id="161" name="Text 159"/>
+          <p:cNvPr id="152" name="Text 150"/>
           <p:cNvSpPr/>
           <p:nvPr/>
         </p:nvSpPr>
@@ -5920,7 +5745,7 @@
       </p:sp>
       <p:sp>
         <p:nvSpPr>
-          <p:cNvPr id="162" name="Shape 160"/>
+          <p:cNvPr id="153" name="Shape 151"/>
           <p:cNvSpPr/>
           <p:nvPr/>
         </p:nvSpPr>
@@ -5932,6 +5757,9 @@
           <a:prstGeom prst="rect">
             <a:avLst/>
           </a:prstGeom>
+          <a:solidFill>
+            <a:srgbClr val="FAEEEE"/>
+          </a:solidFill>
           <a:ln w="12700">
             <a:solidFill>
               <a:srgbClr val="C00000"/>
@@ -5942,7 +5770,7 @@
       </p:sp>
       <p:sp>
         <p:nvSpPr>
-          <p:cNvPr id="163" name="Text 161"/>
+          <p:cNvPr id="154" name="Text 152"/>
           <p:cNvSpPr/>
           <p:nvPr/>
         </p:nvSpPr>
@@ -6001,7 +5829,7 @@
       </p:sp>
       <p:pic>
         <p:nvPicPr>
-          <p:cNvPr id="164" name="Image 0" descr="/home/ahmed/Projects/ai_llm_slides/videos/deep-learning/002_transformers_part2/recreated_pptx/build/assets/brace_020.png">    </p:cNvPr>
+          <p:cNvPr id="155" name="Image 0" descr="/home/ahmed/Projects/ai_llm_slides/videos/deep-learning/002_transformers_part2/recreated_pptx/build/assets/brace_020.png">    </p:cNvPr>
           <p:cNvPicPr>
             <a:picLocks noChangeAspect="1"/>
           </p:cNvPicPr>
@@ -6025,7 +5853,7 @@
       </p:pic>
       <p:sp>
         <p:nvSpPr>
-          <p:cNvPr id="165" name="Text 162"/>
+          <p:cNvPr id="156" name="Text 153"/>
           <p:cNvSpPr/>
           <p:nvPr/>
         </p:nvSpPr>
@@ -6064,7 +5892,7 @@
       </p:sp>
       <p:sp>
         <p:nvSpPr>
-          <p:cNvPr id="166" name="Shape 163"/>
+          <p:cNvPr id="157" name="Shape 154"/>
           <p:cNvSpPr/>
           <p:nvPr/>
         </p:nvSpPr>
@@ -6079,7 +5907,7 @@
           <a:solidFill>
             <a:srgbClr val="FFFFFF"/>
           </a:solidFill>
-          <a:ln w="12700">
+          <a:ln w="19050">
             <a:solidFill>
               <a:srgbClr val="008000"/>
             </a:solidFill>
@@ -6089,14 +5917,14 @@
       </p:sp>
       <p:sp>
         <p:nvSpPr>
-          <p:cNvPr id="167" name="Text 164"/>
-          <p:cNvSpPr/>
-          <p:nvPr/>
-        </p:nvSpPr>
-        <p:spPr>
-          <a:xfrm>
-            <a:off x="676690" y="5680737"/>
-            <a:ext cx="1668838" cy="203200"/>
+          <p:cNvPr id="158" name="Text 155"/>
+          <p:cNvSpPr/>
+          <p:nvPr/>
+        </p:nvSpPr>
+        <p:spPr>
+          <a:xfrm>
+            <a:off x="702090" y="5566437"/>
+            <a:ext cx="787400" cy="330200"/>
           </a:xfrm>
           <a:prstGeom prst="rect">
             <a:avLst/>
@@ -6109,10 +5937,13 @@
           <a:lstStyle/>
           <a:p>
             <a:pPr algn="l" indent="0" marL="0">
-              <a:buNone/>
-            </a:pPr>
-            <a:r>
-              <a:rPr lang="en-US" sz="1150" dirty="0">
+              <a:lnSpc>
+                <a:spcPts val="1100"/>
+              </a:lnSpc>
+              <a:buNone/>
+            </a:pPr>
+            <a:r>
+              <a:rPr lang="en-US" sz="900" dirty="0">
                 <a:solidFill>
                   <a:srgbClr val="000000"/>
                 </a:solidFill>
@@ -6120,22 +5951,65 @@
                 <a:ea typeface="Arial" pitchFamily="34" charset="-122"/>
                 <a:cs typeface="Arial" pitchFamily="34" charset="-120"/>
               </a:rPr>
-              <a:t>Positional Encoding</a:t>
-            </a:r>
-            <a:endParaRPr lang="en-US" sz="1150" dirty="0"/>
+              <a:t>Positional</a:t>
+            </a:r>
+            <a:endParaRPr lang="en-US" sz="900" dirty="0"/>
+          </a:p>
+          <a:p>
+            <a:pPr algn="l" indent="0" marL="0">
+              <a:lnSpc>
+                <a:spcPts val="1100"/>
+              </a:lnSpc>
+              <a:buNone/>
+            </a:pPr>
+            <a:r>
+              <a:rPr lang="en-US" sz="900" dirty="0">
+                <a:solidFill>
+                  <a:srgbClr val="000000"/>
+                </a:solidFill>
+                <a:latin typeface="Arial" pitchFamily="34" charset="0"/>
+                <a:ea typeface="Arial" pitchFamily="34" charset="-122"/>
+                <a:cs typeface="Arial" pitchFamily="34" charset="-120"/>
+              </a:rPr>
+              <a:t>Encoding</a:t>
+            </a:r>
+            <a:endParaRPr lang="en-US" sz="900" dirty="0"/>
           </a:p>
         </p:txBody>
       </p:sp>
       <p:sp>
         <p:nvSpPr>
-          <p:cNvPr id="168" name="Shape 165"/>
-          <p:cNvSpPr/>
-          <p:nvPr/>
-        </p:nvSpPr>
-        <p:spPr>
-          <a:xfrm>
-            <a:off x="829090" y="5960137"/>
-            <a:ext cx="355600" cy="355600"/>
+          <p:cNvPr id="159" name="Shape 156"/>
+          <p:cNvSpPr/>
+          <p:nvPr/>
+        </p:nvSpPr>
+        <p:spPr>
+          <a:xfrm>
+            <a:off x="2081310" y="5515637"/>
+            <a:ext cx="0" cy="159385"/>
+          </a:xfrm>
+          <a:prstGeom prst="line">
+            <a:avLst/>
+          </a:prstGeom>
+          <a:noFill/>
+          <a:ln w="12700">
+            <a:solidFill>
+              <a:srgbClr val="000000"/>
+            </a:solidFill>
+            <a:prstDash val="solid"/>
+          </a:ln>
+        </p:spPr>
+      </p:sp>
+      <p:sp>
+        <p:nvSpPr>
+          <p:cNvPr id="160" name="Shape 157"/>
+          <p:cNvSpPr/>
+          <p:nvPr/>
+        </p:nvSpPr>
+        <p:spPr>
+          <a:xfrm>
+            <a:off x="1821595" y="5675022"/>
+            <a:ext cx="158750" cy="158750"/>
           </a:xfrm>
           <a:prstGeom prst="ellipse">
             <a:avLst/>
@@ -6153,14 +6027,14 @@
       </p:sp>
       <p:sp>
         <p:nvSpPr>
-          <p:cNvPr id="169" name="Text 166"/>
-          <p:cNvSpPr/>
-          <p:nvPr/>
-        </p:nvSpPr>
-        <p:spPr>
-          <a:xfrm>
-            <a:off x="854490" y="5985537"/>
-            <a:ext cx="304800" cy="304800"/>
+          <p:cNvPr id="161" name="Text 158"/>
+          <p:cNvSpPr/>
+          <p:nvPr/>
+        </p:nvSpPr>
+        <p:spPr>
+          <a:xfrm>
+            <a:off x="1821595" y="5675022"/>
+            <a:ext cx="158750" cy="158750"/>
           </a:xfrm>
           <a:prstGeom prst="rect">
             <a:avLst/>
@@ -6176,7 +6050,7 @@
               <a:buNone/>
             </a:pPr>
             <a:r>
-              <a:rPr lang="en-US" sz="2400" b="1" dirty="0">
+              <a:rPr lang="en-US" sz="1300" b="1" dirty="0">
                 <a:solidFill>
                   <a:srgbClr val="000000"/>
                 </a:solidFill>
@@ -6186,20 +6060,20 @@
               </a:rPr>
               <a:t>~</a:t>
             </a:r>
-            <a:endParaRPr lang="en-US" sz="2400" dirty="0"/>
+            <a:endParaRPr lang="en-US" sz="1300" dirty="0"/>
           </a:p>
         </p:txBody>
       </p:sp>
       <p:sp>
         <p:nvSpPr>
-          <p:cNvPr id="170" name="Shape 167"/>
-          <p:cNvSpPr/>
-          <p:nvPr/>
-        </p:nvSpPr>
-        <p:spPr>
-          <a:xfrm>
-            <a:off x="1540290" y="5972837"/>
-            <a:ext cx="152400" cy="152400"/>
+          <p:cNvPr id="162" name="Shape 159"/>
+          <p:cNvSpPr/>
+          <p:nvPr/>
+        </p:nvSpPr>
+        <p:spPr>
+          <a:xfrm>
+            <a:off x="2001935" y="5675022"/>
+            <a:ext cx="158750" cy="158750"/>
           </a:xfrm>
           <a:prstGeom prst="ellipse">
             <a:avLst/>
@@ -6217,62 +6091,14 @@
       </p:sp>
       <p:sp>
         <p:nvSpPr>
-          <p:cNvPr id="171" name="Shape 168"/>
-          <p:cNvSpPr/>
-          <p:nvPr/>
-        </p:nvSpPr>
-        <p:spPr>
-          <a:xfrm>
-            <a:off x="1184690" y="6137937"/>
-            <a:ext cx="355600" cy="-88900"/>
-          </a:xfrm>
-          <a:prstGeom prst="line">
-            <a:avLst/>
-          </a:prstGeom>
-          <a:noFill/>
-          <a:ln w="12700">
-            <a:solidFill>
-              <a:srgbClr val="000000"/>
-            </a:solidFill>
-            <a:prstDash val="solid"/>
-          </a:ln>
-        </p:spPr>
-      </p:sp>
-      <p:sp>
-        <p:nvSpPr>
-          <p:cNvPr id="172" name="Shape 169"/>
-          <p:cNvSpPr/>
-          <p:nvPr/>
-        </p:nvSpPr>
-        <p:spPr>
-          <a:xfrm>
-            <a:off x="803690" y="6379237"/>
-            <a:ext cx="1168400" cy="330200"/>
-          </a:xfrm>
-          <a:prstGeom prst="rect">
-            <a:avLst/>
-          </a:prstGeom>
-          <a:solidFill>
-            <a:srgbClr val="F4B8D0"/>
-          </a:solidFill>
-          <a:ln w="9525">
-            <a:solidFill>
-              <a:srgbClr val="C88AA6"/>
-            </a:solidFill>
-            <a:prstDash val="solid"/>
-          </a:ln>
-        </p:spPr>
-      </p:sp>
-      <p:sp>
-        <p:nvSpPr>
-          <p:cNvPr id="173" name="Text 170"/>
-          <p:cNvSpPr/>
-          <p:nvPr/>
-        </p:nvSpPr>
-        <p:spPr>
-          <a:xfrm>
-            <a:off x="803690" y="6379237"/>
-            <a:ext cx="1168400" cy="330200"/>
+          <p:cNvPr id="163" name="Text 160"/>
+          <p:cNvSpPr/>
+          <p:nvPr/>
+        </p:nvSpPr>
+        <p:spPr>
+          <a:xfrm>
+            <a:off x="2001935" y="5675022"/>
+            <a:ext cx="158750" cy="158750"/>
           </a:xfrm>
           <a:prstGeom prst="rect">
             <a:avLst/>
@@ -6288,7 +6114,7 @@
               <a:buNone/>
             </a:pPr>
             <a:r>
-              <a:rPr lang="en-US" sz="900" dirty="0">
+              <a:rPr lang="en-US" sz="1000" b="1" dirty="0">
                 <a:solidFill>
                   <a:srgbClr val="000000"/>
                 </a:solidFill>
@@ -6296,72 +6122,22 @@
                 <a:ea typeface="Arial" pitchFamily="34" charset="-122"/>
                 <a:cs typeface="Arial" pitchFamily="34" charset="-120"/>
               </a:rPr>
-              <a:t>Input Embedding</a:t>
-            </a:r>
-            <a:endParaRPr lang="en-US" sz="900" dirty="0"/>
+              <a:t>+</a:t>
+            </a:r>
+            <a:endParaRPr lang="en-US" sz="1000" dirty="0"/>
           </a:p>
         </p:txBody>
       </p:sp>
       <p:sp>
         <p:nvSpPr>
-          <p:cNvPr id="174" name="Shape 171"/>
-          <p:cNvSpPr/>
-          <p:nvPr/>
-        </p:nvSpPr>
-        <p:spPr>
-          <a:xfrm rot="1080000">
-            <a:off x="2035590" y="6480837"/>
-            <a:ext cx="38100" cy="127000"/>
-          </a:xfrm>
-          <a:prstGeom prst="rect">
-            <a:avLst/>
-          </a:prstGeom>
-          <a:solidFill>
-            <a:srgbClr val="FFA500"/>
-          </a:solidFill>
-          <a:ln w="12700">
-            <a:solidFill>
-              <a:srgbClr val="FFA500"/>
-            </a:solidFill>
-            <a:prstDash val="solid"/>
-          </a:ln>
-        </p:spPr>
-      </p:sp>
-      <p:sp>
-        <p:nvSpPr>
-          <p:cNvPr id="175" name="Shape 172"/>
-          <p:cNvSpPr/>
-          <p:nvPr/>
-        </p:nvSpPr>
-        <p:spPr>
-          <a:xfrm rot="-1080000">
-            <a:off x="2073690" y="6480837"/>
-            <a:ext cx="38100" cy="127000"/>
-          </a:xfrm>
-          <a:prstGeom prst="rect">
-            <a:avLst/>
-          </a:prstGeom>
-          <a:solidFill>
-            <a:srgbClr val="FFA500"/>
-          </a:solidFill>
-          <a:ln w="12700">
-            <a:solidFill>
-              <a:srgbClr val="FFA500"/>
-            </a:solidFill>
-            <a:prstDash val="solid"/>
-          </a:ln>
-        </p:spPr>
-      </p:sp>
-      <p:sp>
-        <p:nvSpPr>
-          <p:cNvPr id="176" name="Shape 173"/>
-          <p:cNvSpPr/>
-          <p:nvPr/>
-        </p:nvSpPr>
-        <p:spPr>
-          <a:xfrm>
-            <a:off x="1616490" y="6125237"/>
-            <a:ext cx="0" cy="254000"/>
+          <p:cNvPr id="164" name="Shape 161"/>
+          <p:cNvSpPr/>
+          <p:nvPr/>
+        </p:nvSpPr>
+        <p:spPr>
+          <a:xfrm>
+            <a:off x="1980345" y="5754397"/>
+            <a:ext cx="21590" cy="0"/>
           </a:xfrm>
           <a:prstGeom prst="line">
             <a:avLst/>
@@ -6377,14 +6153,149 @@
       </p:sp>
       <p:sp>
         <p:nvSpPr>
-          <p:cNvPr id="177" name="Text 174"/>
-          <p:cNvSpPr/>
-          <p:nvPr/>
-        </p:nvSpPr>
-        <p:spPr>
-          <a:xfrm>
-            <a:off x="803690" y="6734837"/>
-            <a:ext cx="635000" cy="152400"/>
+          <p:cNvPr id="165" name="Shape 162"/>
+          <p:cNvSpPr/>
+          <p:nvPr/>
+        </p:nvSpPr>
+        <p:spPr>
+          <a:xfrm>
+            <a:off x="1485680" y="5967757"/>
+            <a:ext cx="910590" cy="345440"/>
+          </a:xfrm>
+          <a:prstGeom prst="rect">
+            <a:avLst/>
+          </a:prstGeom>
+          <a:solidFill>
+            <a:srgbClr val="F4B8D0"/>
+          </a:solidFill>
+          <a:ln w="9525">
+            <a:solidFill>
+              <a:srgbClr val="C88AA6"/>
+            </a:solidFill>
+            <a:prstDash val="solid"/>
+          </a:ln>
+        </p:spPr>
+      </p:sp>
+      <p:sp>
+        <p:nvSpPr>
+          <p:cNvPr id="166" name="Text 163"/>
+          <p:cNvSpPr/>
+          <p:nvPr/>
+        </p:nvSpPr>
+        <p:spPr>
+          <a:xfrm>
+            <a:off x="1485680" y="5967757"/>
+            <a:ext cx="910590" cy="345440"/>
+          </a:xfrm>
+          <a:prstGeom prst="rect">
+            <a:avLst/>
+          </a:prstGeom>
+          <a:noFill/>
+          <a:ln/>
+        </p:spPr>
+        <p:txBody>
+          <a:bodyPr wrap="square" lIns="0" tIns="0" rIns="0" bIns="0" rtlCol="0" anchor="ctr"/>
+          <a:lstStyle/>
+          <a:p>
+            <a:pPr algn="ctr" indent="0" marL="0">
+              <a:lnSpc>
+                <a:spcPts val="900"/>
+              </a:lnSpc>
+              <a:buNone/>
+            </a:pPr>
+            <a:r>
+              <a:rPr lang="en-US" sz="800" dirty="0">
+                <a:solidFill>
+                  <a:srgbClr val="000000"/>
+                </a:solidFill>
+                <a:latin typeface="Arial" pitchFamily="34" charset="0"/>
+                <a:ea typeface="Arial" pitchFamily="34" charset="-122"/>
+                <a:cs typeface="Arial" pitchFamily="34" charset="-120"/>
+              </a:rPr>
+              <a:t>Input</a:t>
+            </a:r>
+            <a:endParaRPr lang="en-US" sz="800" dirty="0"/>
+          </a:p>
+          <a:p>
+            <a:pPr algn="ctr" indent="0" marL="0">
+              <a:lnSpc>
+                <a:spcPts val="900"/>
+              </a:lnSpc>
+              <a:buNone/>
+            </a:pPr>
+            <a:r>
+              <a:rPr lang="en-US" sz="800" dirty="0">
+                <a:solidFill>
+                  <a:srgbClr val="000000"/>
+                </a:solidFill>
+                <a:latin typeface="Arial" pitchFamily="34" charset="0"/>
+                <a:ea typeface="Arial" pitchFamily="34" charset="-122"/>
+                <a:cs typeface="Arial" pitchFamily="34" charset="-120"/>
+              </a:rPr>
+              <a:t>Embedding</a:t>
+            </a:r>
+            <a:endParaRPr lang="en-US" sz="800" dirty="0"/>
+          </a:p>
+        </p:txBody>
+      </p:sp>
+      <p:sp>
+        <p:nvSpPr>
+          <p:cNvPr id="167" name="Shape 164"/>
+          <p:cNvSpPr/>
+          <p:nvPr/>
+        </p:nvSpPr>
+        <p:spPr>
+          <a:xfrm>
+            <a:off x="1991775" y="5833772"/>
+            <a:ext cx="0" cy="133985"/>
+          </a:xfrm>
+          <a:prstGeom prst="line">
+            <a:avLst/>
+          </a:prstGeom>
+          <a:noFill/>
+          <a:ln w="12700">
+            <a:solidFill>
+              <a:srgbClr val="000000"/>
+            </a:solidFill>
+            <a:prstDash val="solid"/>
+            <a:tailEnd type="triangle"/>
+          </a:ln>
+        </p:spPr>
+      </p:sp>
+      <p:sp>
+        <p:nvSpPr>
+          <p:cNvPr id="168" name="Shape 165"/>
+          <p:cNvSpPr/>
+          <p:nvPr/>
+        </p:nvSpPr>
+        <p:spPr>
+          <a:xfrm>
+            <a:off x="1991775" y="6351297"/>
+            <a:ext cx="0" cy="215900"/>
+          </a:xfrm>
+          <a:prstGeom prst="line">
+            <a:avLst/>
+          </a:prstGeom>
+          <a:noFill/>
+          <a:ln w="15875">
+            <a:solidFill>
+              <a:srgbClr val="000000"/>
+            </a:solidFill>
+            <a:prstDash val="solid"/>
+            <a:headEnd type="triangle"/>
+          </a:ln>
+        </p:spPr>
+      </p:sp>
+      <p:sp>
+        <p:nvSpPr>
+          <p:cNvPr id="169" name="Text 166"/>
+          <p:cNvSpPr/>
+          <p:nvPr/>
+        </p:nvSpPr>
+        <p:spPr>
+          <a:xfrm>
+            <a:off x="1850170" y="6579897"/>
+            <a:ext cx="558800" cy="101600"/>
           </a:xfrm>
           <a:prstGeom prst="rect">
             <a:avLst/>
@@ -6400,30 +6311,30 @@
               <a:buNone/>
             </a:pPr>
             <a:r>
-              <a:rPr lang="en-US" sz="950" dirty="0">
-                <a:solidFill>
-                  <a:srgbClr val="8C8C8C"/>
+              <a:rPr lang="en-US" sz="800" dirty="0">
+                <a:solidFill>
+                  <a:srgbClr val="404040"/>
                 </a:solidFill>
                 <a:latin typeface="Arial" pitchFamily="34" charset="0"/>
                 <a:ea typeface="Arial" pitchFamily="34" charset="-122"/>
                 <a:cs typeface="Arial" pitchFamily="34" charset="-120"/>
               </a:rPr>
-              <a:t>inputs</a:t>
-            </a:r>
-            <a:endParaRPr lang="en-US" sz="950" dirty="0"/>
+              <a:t>Inputs</a:t>
+            </a:r>
+            <a:endParaRPr lang="en-US" sz="800" dirty="0"/>
           </a:p>
         </p:txBody>
       </p:sp>
       <p:sp>
         <p:nvSpPr>
-          <p:cNvPr id="178" name="Shape 175"/>
-          <p:cNvSpPr/>
-          <p:nvPr/>
-        </p:nvSpPr>
-        <p:spPr>
-          <a:xfrm>
-            <a:off x="1184690" y="6722137"/>
-            <a:ext cx="0" cy="-304800"/>
+          <p:cNvPr id="170" name="Shape 167"/>
+          <p:cNvSpPr/>
+          <p:nvPr/>
+        </p:nvSpPr>
+        <p:spPr>
+          <a:xfrm>
+            <a:off x="11492944" y="1993604"/>
+            <a:ext cx="0" cy="398721"/>
           </a:xfrm>
           <a:prstGeom prst="line">
             <a:avLst/>
@@ -6431,23 +6342,45 @@
           <a:noFill/>
           <a:ln w="15875">
             <a:solidFill>
-              <a:srgbClr val="000000"/>
-            </a:solidFill>
-            <a:prstDash val="solid"/>
-            <a:tailEnd type="triangle"/>
-          </a:ln>
-        </p:spPr>
-      </p:sp>
-      <p:sp>
-        <p:nvSpPr>
-          <p:cNvPr id="179" name="Text 176"/>
-          <p:cNvSpPr/>
-          <p:nvPr/>
-        </p:nvSpPr>
-        <p:spPr>
-          <a:xfrm>
-            <a:off x="2343479" y="6207934"/>
-            <a:ext cx="1024407" cy="474921"/>
+              <a:srgbClr val="C00000"/>
+            </a:solidFill>
+            <a:prstDash val="sysDash"/>
+          </a:ln>
+        </p:spPr>
+      </p:sp>
+      <p:sp>
+        <p:nvSpPr>
+          <p:cNvPr id="171" name="Shape 168"/>
+          <p:cNvSpPr/>
+          <p:nvPr/>
+        </p:nvSpPr>
+        <p:spPr>
+          <a:xfrm>
+            <a:off x="11492944" y="2458778"/>
+            <a:ext cx="0" cy="1129709"/>
+          </a:xfrm>
+          <a:prstGeom prst="line">
+            <a:avLst/>
+          </a:prstGeom>
+          <a:noFill/>
+          <a:ln w="15875">
+            <a:solidFill>
+              <a:srgbClr val="C00000"/>
+            </a:solidFill>
+            <a:prstDash val="sysDash"/>
+          </a:ln>
+        </p:spPr>
+      </p:sp>
+      <p:sp>
+        <p:nvSpPr>
+          <p:cNvPr id="172" name="Text 169"/>
+          <p:cNvSpPr/>
+          <p:nvPr/>
+        </p:nvSpPr>
+        <p:spPr>
+          <a:xfrm>
+            <a:off x="2449177" y="6207934"/>
+            <a:ext cx="971558" cy="474921"/>
           </a:xfrm>
           <a:prstGeom prst="rect">
             <a:avLst/>
@@ -6466,7 +6399,7 @@
               <a:buNone/>
             </a:pPr>
             <a:r>
-              <a:rPr lang="en-US" sz="1550" b="1" dirty="0">
+              <a:rPr lang="en-US" sz="1400" b="1" dirty="0">
                 <a:solidFill>
                   <a:srgbClr val="008000"/>
                 </a:solidFill>
@@ -6476,7 +6409,7 @@
               </a:rPr>
               <a:t>Input to</a:t>
             </a:r>
-            <a:endParaRPr lang="en-US" sz="1550" dirty="0"/>
+            <a:endParaRPr lang="en-US" sz="1400" dirty="0"/>
           </a:p>
           <a:p>
             <a:pPr algn="l" indent="0" marL="0">
@@ -6486,7 +6419,7 @@
               <a:buNone/>
             </a:pPr>
             <a:r>
-              <a:rPr lang="en-US" sz="1550" b="1" dirty="0">
+              <a:rPr lang="en-US" sz="1400" b="1" dirty="0">
                 <a:solidFill>
                   <a:srgbClr val="008000"/>
                 </a:solidFill>
@@ -6496,7 +6429,7 @@
               </a:rPr>
               <a:t>Encoder</a:t>
             </a:r>
-            <a:endParaRPr lang="en-US" sz="1550" dirty="0"/>
+            <a:endParaRPr lang="en-US" sz="1400" dirty="0"/>
           </a:p>
         </p:txBody>
       </p:sp>
